--- a/it/slides/08-Architettura_dei_Calcolatori-Algebra_di_Boole_1-Codice.pptx
+++ b/it/slides/08-Architettura_dei_Calcolatori-Algebra_di_Boole_1-Codice.pptx
@@ -126,23 +126,27 @@
   <p:extLst>
     <p:ext uri="{521415D9-36F7-43E2-AB2F-B90AF26B5E84}">
       <p14:sectionLst xmlns:p14="http://schemas.microsoft.com/office/powerpoint/2010/main">
-        <p14:section name="Apertura" id="{0b663490-7e3c-166d-5953-5bb9b4825138}">
+        <p14:section name="Apertura" id="{3a9064a1-5e9f-63b2-e826-a52c5dbc9f4e}">
           <p14:sldIdLst>
             <p14:sldId id="256"/>
             <p14:sldId id="257"/>
           </p14:sldIdLst>
         </p14:section>
-        <p14:section name="I listati" id="{8c1364ad-93fe-0ae1-0c63-a932687cd4bd}">
+        <p14:section name="Riscaldamento sulla macchina" id="{9c693047-74ac-8a86-08bd-9c3b853b695b}">
           <p14:sldIdLst>
             <p14:sldId id="258"/>
             <p14:sldId id="259"/>
+          </p14:sldIdLst>
+        </p14:section>
+        <p14:section name="Ritorno alla macchina" id="{fb13b91c-8e61-1a48-4fd8-c5eb9c214879}">
+          <p14:sldIdLst>
             <p14:sldId id="260"/>
             <p14:sldId id="261"/>
             <p14:sldId id="262"/>
             <p14:sldId id="263"/>
           </p14:sldIdLst>
         </p14:section>
-        <p14:section name="Il programma completo" id="{46fd093e-d40d-f87e-9223-597f849a71d0}">
+        <p14:section name="Il programma completo" id="{50dff76f-af4f-82b0-b635-ded7619ac33e}">
           <p14:sldIdLst>
             <p14:sldId id="264"/>
             <p14:sldId id="265"/>
@@ -152,7 +156,7 @@
             <p14:sldId id="269"/>
           </p14:sldIdLst>
         </p14:section>
-        <p14:section name="Eseguire e provare" id="{115813d5-428a-e9e8-1d1d-1c23f7c9984c}">
+        <p14:section name="Eseguire e provare" id="{15361c4f-b057-04b9-8ff9-63e333fb3d4b}">
           <p14:sldIdLst>
             <p14:sldId id="270"/>
             <p14:sldId id="271"/>
@@ -161,7 +165,7 @@
             <p14:sldId id="274"/>
           </p14:sldIdLst>
         </p14:section>
-        <p14:section name="Esercizi" id="{511d0983-df6f-d06a-009c-3da1baca9463}">
+        <p14:section name="Esercizi" id="{c41a8330-301a-9268-c484-4897851f9d70}">
           <p14:sldIdLst>
             <p14:sldId id="275"/>
           </p14:sldIdLst>
@@ -3235,7 +3239,63 @@
       </p:sp>
       <p:sp>
         <p:nvSpPr>
-          <p:cNvPr id="11" name="Shape 9"/>
+          <p:cNvPr id="11" name="Text 9"/>
+          <p:cNvSpPr txBox="1"/>
+          <p:nvPr/>
+        </p:nvSpPr>
+        <p:spPr>
+          <a:xfrm>
+            <a:off x="4693615" y="566928"/>
+            <a:ext cx="6949440" cy="640080"/>
+          </a:xfrm>
+          <a:prstGeom prst="rect">
+            <a:avLst/>
+          </a:prstGeom>
+          <a:noFill/>
+          <a:ln/>
+        </p:spPr>
+        <p:txBody>
+          <a:bodyPr wrap="square" lIns="0" tIns="0" rIns="0" bIns="0" rtlCol="0" anchor="t"/>
+          <a:lstStyle/>
+          <a:p>
+            <a:pPr algn="r" indent="0" marL="0">
+              <a:buNone/>
+            </a:pPr>
+            <a:r>
+              <a:rPr lang="en-US" sz="1300" dirty="0">
+                <a:solidFill>
+                  <a:srgbClr val="CFE3EA"/>
+                </a:solidFill>
+                <a:latin typeface="Calibri" pitchFamily="34" charset="0"/>
+                <a:ea typeface="Calibri" pitchFamily="34" charset="-122"/>
+                <a:cs typeface="Calibri" pitchFamily="34" charset="-120"/>
+              </a:rPr>
+              <a:t>Presentazione del codice. I concetti, le figure e le domande sono nella presentazione della lezione:</a:t>
+            </a:r>
+            <a:endParaRPr lang="en-US" sz="1300" dirty="0"/>
+          </a:p>
+          <a:p>
+            <a:pPr algn="r" indent="0" marL="0">
+              <a:buNone/>
+            </a:pPr>
+            <a:r>
+              <a:rPr lang="en-US" sz="1300" dirty="0">
+                <a:solidFill>
+                  <a:srgbClr val="CFE3EA"/>
+                </a:solidFill>
+                <a:latin typeface="Calibri" pitchFamily="34" charset="0"/>
+                <a:ea typeface="Calibri" pitchFamily="34" charset="-122"/>
+                <a:cs typeface="Calibri" pitchFamily="34" charset="-120"/>
+              </a:rPr>
+              <a:t>08-Architettura_dei_Calcolatori-Algebra_di_Boole_1.pptx</a:t>
+            </a:r>
+            <a:endParaRPr lang="en-US" sz="1300" dirty="0"/>
+          </a:p>
+        </p:txBody>
+      </p:sp>
+      <p:sp>
+        <p:nvSpPr>
+          <p:cNvPr id="12" name="Shape 10"/>
           <p:cNvSpPr/>
           <p:nvPr/>
         </p:nvSpPr>
@@ -3262,7 +3322,7 @@
       </p:sp>
       <p:pic>
         <p:nvPicPr>
-          <p:cNvPr id="12" name="Image 0" descr="/Users/raffaelemontella/devel/riscv-prg32/computer-architecture-with-prg32/tools/assets/lab2_step1_lamps.png">    </p:cNvPr>
+          <p:cNvPr id="13" name="Image 0" descr="/Users/raffaelemontella/devel/riscv-prg32/computer-architecture-with-prg32/tools/assets/lab2_step1_lamps.png">    </p:cNvPr>
           <p:cNvPicPr>
             <a:picLocks noChangeAspect="1"/>
           </p:cNvPicPr>

--- a/it/slides/08-Architettura_dei_Calcolatori-Algebra_di_Boole_1-Codice.pptx
+++ b/it/slides/08-Architettura_dei_Calcolatori-Algebra_di_Boole_1-Codice.pptx
@@ -126,19 +126,19 @@
   <p:extLst>
     <p:ext uri="{521415D9-36F7-43E2-AB2F-B90AF26B5E84}">
       <p14:sectionLst xmlns:p14="http://schemas.microsoft.com/office/powerpoint/2010/main">
-        <p14:section name="Apertura" id="{3a9064a1-5e9f-63b2-e826-a52c5dbc9f4e}">
+        <p14:section name="Apertura" id="{177ec0d8-6948-9c24-0c7f-b96893c3fd9f}">
           <p14:sldIdLst>
             <p14:sldId id="256"/>
             <p14:sldId id="257"/>
           </p14:sldIdLst>
         </p14:section>
-        <p14:section name="Riscaldamento sulla macchina" id="{9c693047-74ac-8a86-08bd-9c3b853b695b}">
+        <p14:section name="Riscaldamento sulla macchina" id="{4a7b56fb-9f20-48a8-854b-1a63e3a2d20f}">
           <p14:sldIdLst>
             <p14:sldId id="258"/>
             <p14:sldId id="259"/>
           </p14:sldIdLst>
         </p14:section>
-        <p14:section name="Ritorno alla macchina" id="{fb13b91c-8e61-1a48-4fd8-c5eb9c214879}">
+        <p14:section name="Ritorno alla macchina" id="{e3b50ac2-79a1-691d-0d0a-5f9cc6c21d40}">
           <p14:sldIdLst>
             <p14:sldId id="260"/>
             <p14:sldId id="261"/>
@@ -146,7 +146,7 @@
             <p14:sldId id="263"/>
           </p14:sldIdLst>
         </p14:section>
-        <p14:section name="Il programma completo" id="{50dff76f-af4f-82b0-b635-ded7619ac33e}">
+        <p14:section name="Il programma completo" id="{5efbae44-65b4-de01-4891-5889c5ea41c0}">
           <p14:sldIdLst>
             <p14:sldId id="264"/>
             <p14:sldId id="265"/>
@@ -156,7 +156,7 @@
             <p14:sldId id="269"/>
           </p14:sldIdLst>
         </p14:section>
-        <p14:section name="Eseguire e provare" id="{15361c4f-b057-04b9-8ff9-63e333fb3d4b}">
+        <p14:section name="Eseguire e provare" id="{6735297a-b9bb-9ce8-f1c6-cf4e8204db58}">
           <p14:sldIdLst>
             <p14:sldId id="270"/>
             <p14:sldId id="271"/>
@@ -165,7 +165,7 @@
             <p14:sldId id="274"/>
           </p14:sldIdLst>
         </p14:section>
-        <p14:section name="Esercizi" id="{c41a8330-301a-9268-c484-4897851f9d70}">
+        <p14:section name="Esercizi" id="{5c47762d-f083-2472-18a6-7a69244b272f}">
           <p14:sldIdLst>
             <p14:sldId id="275"/>
           </p14:sldIdLst>
@@ -574,7 +574,9 @@
           <a:p>
             <a:r>
               <a:rPr lang="en-US" dirty="0"/>
-              <a:t>Questa è la presentazione del codice della Lezione 08. La presentazione della lezione contiene i concetti; questa contiene tutto ciò che si scrive e si esegue: i listati con la loro spiegazione, il programma completo, che cosa mostra, e il modo di provarlo su ciascuno dei tre host.</a:t>
+              <a:t>Questa è la presentazione del codice della Lezione 08. La presentazione della lezione contiene i concetti; questa contiene tutto ciò che si scrive e si esegue: i listati con la loro spiegazione, il programma completo, che cosa mostra, e il modo di provarlo su ciascuno dei tre host.
+Stato di apprendimento: DA COMPRENDERE OGGI, alla fine di questa lezione lo spiegate, lo seguite passo passo e lo applicate da soli; DA UTILIZZARE OGGI, oggi seguite e usate la ricetta; come funziona dentro si spiega più avanti, o non fa parte del corso; DA COMPRENDERE PIÙ AVANTI, riconoscete il nome e lo scopo; lo spiega una lezione successiva. Una slide senza etichetta è contesto: una storia, un esempio, una domanda, un esercizio.
+Stato di apprendimento di questa lezione. DA COMPRENDERE OGGI: le maschere di bit; l'architettura di von Neumann; analisi e sintesi; l'algebra di Boole; le porte logiche. DA UTILIZZARE OGGI: il programma completo, gli strumenti di PRG32 (si usa, non si studia, in questo corso). DA COMPRENDERE PIÙ AVANTI: minimizzazione, Karnaugh (Lezione 09). Una slide senza etichetta è contesto: una storia, un esempio, una domanda, un esercizio.</a:t>
             </a:r>
             <a:endParaRPr lang="en-US" dirty="0"/>
           </a:p>
@@ -663,6 +665,7 @@
             <a:r>
               <a:rPr lang="en-US" dirty="0"/>
               <a:t>Una pagina del programma completo, esattamente com'è nel repository. Leggetelo dall'inizio: l'intestazione dice che cosa mostra il programma e come compilarlo; seguono le tre funzioni init, update e draw, poi i dati. Le righe incontrate nei listati della lezione hanno qui gli stessi commenti.
+DA UTILIZZARE OGGI: il programma completo (si usa, non si studia, in questo corso).
 Per il docente: code/l08.S, come viene compilato ed eseguito dai test. I commenti fanno parte del programma, e sono in inglese come in tutti i listati: leggeteli con il codice.</a:t>
             </a:r>
             <a:endParaRPr lang="en-US" dirty="0"/>
@@ -752,6 +755,7 @@
             <a:r>
               <a:rPr lang="en-US" dirty="0"/>
               <a:t>Una pagina del programma completo, esattamente com'è nel repository. Leggetelo dall'inizio: l'intestazione dice che cosa mostra il programma e come compilarlo; seguono le tre funzioni init, update e draw, poi i dati. Le righe incontrate nei listati della lezione hanno qui gli stessi commenti.
+DA UTILIZZARE OGGI: il programma completo (si usa, non si studia, in questo corso).
 Per il docente: code/l08.S, come viene compilato ed eseguito dai test. I commenti fanno parte del programma, e sono in inglese come in tutti i listati: leggeteli con il codice.</a:t>
             </a:r>
             <a:endParaRPr lang="en-US" dirty="0"/>
@@ -841,6 +845,7 @@
             <a:r>
               <a:rPr lang="en-US" dirty="0"/>
               <a:t>Una pagina del programma completo, esattamente com'è nel repository. Leggetelo dall'inizio: l'intestazione dice che cosa mostra il programma e come compilarlo; seguono le tre funzioni init, update e draw, poi i dati. Le righe incontrate nei listati della lezione hanno qui gli stessi commenti.
+DA UTILIZZARE OGGI: il programma completo (si usa, non si studia, in questo corso).
 Per il docente: code/l08.S, come viene compilato ed eseguito dai test. I commenti fanno parte del programma, e sono in inglese come in tutti i listati: leggeteli con il codice.</a:t>
             </a:r>
             <a:endParaRPr lang="en-US" dirty="0"/>
@@ -930,6 +935,7 @@
             <a:r>
               <a:rPr lang="en-US" dirty="0"/>
               <a:t>Una pagina del programma completo, esattamente com'è nel repository. Leggetelo dall'inizio: l'intestazione dice che cosa mostra il programma e come compilarlo; seguono le tre funzioni init, update e draw, poi i dati. Le righe incontrate nei listati della lezione hanno qui gli stessi commenti.
+DA UTILIZZARE OGGI: il programma completo (si usa, non si studia, in questo corso).
 Per il docente: code/l08.S, come viene compilato ed eseguito dai test. I commenti fanno parte del programma, e sono in inglese come in tutti i listati: leggeteli con il codice.</a:t>
             </a:r>
             <a:endParaRPr lang="en-US" dirty="0"/>
@@ -1019,6 +1025,7 @@
             <a:r>
               <a:rPr lang="en-US" dirty="0"/>
               <a:t>Una pagina del programma completo, esattamente com'è nel repository. Leggetelo dall'inizio: l'intestazione dice che cosa mostra il programma e come compilarlo; seguono le tre funzioni init, update e draw, poi i dati. Le righe incontrate nei listati della lezione hanno qui gli stessi commenti.
+DA UTILIZZARE OGGI: il programma completo (si usa, non si studia, in questo corso).
 Per il docente: code/l08.S, come viene compilato ed eseguito dai test. I commenti fanno parte del programma, e sono in inglese come in tutti i listati: leggeteli con il codice.</a:t>
             </a:r>
             <a:endParaRPr lang="en-US" dirty="0"/>
@@ -1197,6 +1204,7 @@
             <a:r>
               <a:rPr lang="en-US" dirty="0"/>
               <a:t>La via più rapida: PRG32-QT sul vostro computer. Quattro passi, ciascuno con il suo comando. PRG32-QT si comporta come una scheda sulla porta 8080, ed è per questo che il comando di caricamento dice esp32c6. Con la modalità debug abilitata potete fermarvi su qualsiasi istruzione e leggere registri e memoria.
+DA UTILIZZARE OGGI: gli strumenti di PRG32 (si usa, non si studia, in questo corso).
 Per il docente: Eseguito dai test: la cartuccia di questa slide è compilata con questo comando ed eseguita sull'esecutore senza interfaccia di PRG32-QT. Senza la toolchain: importate il file .prg32 in PRG32-QT e scegliete Run Cartridge. Tasti: frecce o WASD per il joystick, Z o J per A, X o K per B, Invio per Start, Esc per tornare a Setup.</a:t>
             </a:r>
             <a:endParaRPr lang="en-US" dirty="0"/>
@@ -1286,6 +1294,7 @@
             <a:r>
               <a:rPr lang="en-US" dirty="0"/>
               <a:t>Lo stesso programma sull'emulatore. QEMU esegue il firmware vero su un chip emulato, quindi la cartuccia va compilata per l'architettura qemu. Caricate la cartuccia mentre QEMU è chiuso. Il firmware si apre sul menu Setup: scegliete Run Cartridge e lo slot. Ricordate che la tastiera è letta dal terminale, non dalla finestra con l'immagine.
+DA UTILIZZARE OGGI: gli strumenti di PRG32 (si usa, non si studia, in questo corso).
 Per il docente: Verificato dai test fino al caricamento: la cartuccia è compilata per l'architettura qemu e accettata nell'immagine flash dell'emulatore. Ciò che l'emulatore poi mostra non è verificato automaticamente: il QEMU di Espressif ha bisogno della sua finestra. Dall'ottobre 2026 il firmware parte da Setup: scegliete Run Cartridge, poi cart0.</a:t>
             </a:r>
             <a:endParaRPr lang="en-US" dirty="0"/>
@@ -1375,6 +1384,7 @@
             <a:r>
               <a:rPr lang="en-US" dirty="0"/>
               <a:t>Lo stesso programma sul kit. Il firmware si scrive una volta, via USB; dopo, le cartucce viaggiano sul Wi-Fi. Il comando di caricamento è quello usato per PRG32-QT con l'indirizzo della scheda. È l'unico host che i test automatici non eseguono: provatelo, e riferite ciò che vedete.
+DA UTILIZZARE OGGI: gli strumenti di PRG32 (si usa, non si studia, in questo corso).
 Per il docente: Non eseguito dai test: sulla macchina di prova non c'è una scheda. La cartuccia per l'architettura esp32c6 è compilata dai test; i passi sono quelli della documentazione di PRG32. Se la porta seriale non viene trovata, passatela esplicitamente. Per usare il Wi-Fi dell'aula: python3 -m prg32 wifi set --ssid NOME --password PASSWORD --mode sta.</a:t>
             </a:r>
             <a:endParaRPr lang="en-US" dirty="0"/>
@@ -1464,6 +1474,7 @@
             <a:r>
               <a:rPr lang="en-US" dirty="0"/>
               <a:t>I cinque sintomi più comuni, che cosa significa ciascuno, e che cosa fare. Leggete il messaggio prima di cambiare qualcosa: quasi sempre nomina la causa.
+DA UTILIZZARE OGGI: gli strumenti di PRG32 (si usa, non si studia, in questo corso).
 Per il docente: Le prime tre righe coprono la maggior parte dei casi. Quando chiedete aiuto, incollate il comando e l'intero messaggio come testo. docs/usage/troubleshooting.md del repository di PRG32 ha l'elenco completo.</a:t>
             </a:r>
             <a:endParaRPr lang="en-US" dirty="0"/>
@@ -1731,6 +1742,7 @@
             <a:r>
               <a:rPr lang="en-US" dirty="0"/>
               <a:t>prg32_input_read restituisce in a0 tutti i pulsanti insieme, un bit per pulsante. andi t3, t0, 0x01 conserva il bit 0 e forza a zero tutti gli altri; il risultato è diverso da zero esattamente quando LEFT è premuto, e in caso contrario beqz salta il movimento. Lo stesso schema, con 0x02, esamina RIGHT. La costante usata con andi si chiama maschera. L'ultima nota pone la domanda della lezione: andi sono trentadue porte AND che lavorano fianco a fianco; che cos'è dunque un AND?
+DA COMPRENDERE OGGI: le maschere di bit.
 Per il docente: Dal capitolo 6 (State and Input) e dal laboratorio 06-asm-state-and-input del libro di PRG32. La costante usata con andi si chiama maschera.</a:t>
             </a:r>
             <a:endParaRPr lang="en-US" dirty="0"/>
@@ -1820,6 +1832,7 @@
             <a:r>
               <a:rPr lang="en-US" dirty="0"/>
               <a:t>Il valore restituito dai pulsanti è una parola in cui ogni bit ha un significato: il bit 0 è LEFT, il bit 1 RIGHT, il bit 2 UP, il bit 3 DOWN, i bit 4 e 5 sono A e B, il bit 6 è START. Tenendo premuti insieme RIGHT e A si ottiene 0x12, cioè 0001 0010. Nell'immagine ogni lampada è un bit di questa parola. Ogni domanda che si può fare sul joystick, come «LEFT è premuto ma RIGHT no?», è un'espressione booleana su queste sette variabili.
+DA COMPRENDERE OGGI: le maschere di bit.
 Per il docente: Costanti dei pulsanti da prg32.h (PRG32_BTN_*). Il secondo giocatore usa la stessa disposizione nei bit più alti.</a:t>
             </a:r>
             <a:endParaRPr lang="en-US" dirty="0"/>
@@ -1909,6 +1922,7 @@
             <a:r>
               <a:rPr lang="en-US" dirty="0"/>
               <a:t>and, or, xor e not applicano una porta a ogni coppia di bit corrispondenti di due registri, in tutte le posizioni insieme. La terza colonna svolge un esempio su otto bit: con a uguale a 1100 1010 e b uguale a 0000 1111, AND dà 0000 1010, OR dà 1100 1111, XOR dà 1100 0101. L'ultima colonna mostra gli stessi operatori in C. not è una pseudo-istruzione: è xori con meno 1, perché meno 1 in complemento a due è fatto di tutti uni.
+DA COMPRENDERE OGGI: le maschere di bit.
 Per il docente: Ogni istruzione applica la stessa porta a tutte e trentadue le coppie di bit insieme (ne sono mostrate otto). Le forme con immediato andi, ori e xori prendono una costante di 12 bit; not è la pseudo-istruzione xori t0, a, -1, perché -1 è fatto di tutti uni.</a:t>
             </a:r>
             <a:endParaRPr lang="en-US" dirty="0"/>
@@ -1998,6 +2012,7 @@
             <a:r>
               <a:rPr lang="en-US" dirty="0"/>
               <a:t>I quattro usi standard di una maschera, ciascuno fondato su una legge dell'algebra. Per esaminare un bit, AND con una maschera che ha 1 in quella posizione: x AND 1 è x, x AND 0 è 0. Per porlo a 1, OR con la stessa maschera. Per azzerarlo, AND con la maschera complementata. Per invertirlo, XOR con la maschera. Negli ultimi tre casi gli altri bit restano invariati, ed è proprio questo il punto: una maschera agisce sui bit scelti e lascia stare gli altri.
+DA COMPRENDERE OGGI: le maschere di bit.
 Per il docente: Le leggi dell'elemento neutro e dell'elemento nullo sono esattamente ciò che fa funzionare una maschera: un 1 nella maschera lascia passare il bit (AND) oppure lo forza (OR); uno 0 fa il contrario. ~0x10 è 0xFFFFFFEF, che l'assemblatore codifica come immediato -17.</a:t>
             </a:r>
             <a:endParaRPr lang="en-US" dirty="0"/>
@@ -2087,6 +2102,7 @@
             <a:r>
               <a:rPr lang="en-US" dirty="0"/>
               <a:t>De Morgan in un programma. Il giocatore è fermo quando non è premuto né LEFT né RIGHT. La versione breve usa una maschera con due bit, 0x03: il risultato è zero solo se entrambi i bit sono zero, cioè NOT (LEFT OR RIGHT). La versione lunga esamina ogni pulsante separatamente: (NOT LEFT) AND (NOT RIGHT). La seconda legge di De Morgan dice che le due sono la stessa condizione. Due istruzioni invece di cinque: semplificare un'espressione è utile nel software come nell'hardware.
+DA COMPRENDERE OGGI: le maschere di bit.
 Per il docente: (x + y)' = x' . y'. Due istruzioni invece di cinque: la minimizzazione non riguarda solo l'hardware.</a:t>
             </a:r>
             <a:endParaRPr lang="en-US" dirty="0"/>
@@ -2176,6 +2192,7 @@
             <a:r>
               <a:rPr lang="en-US" dirty="0"/>
               <a:t>Come leggere il bit numero n di una parola quando n sta in un registro: si scorre la parola a destra di n posizioni, così il bit voluto arriva in posizione 0, poi si maschera con 1. Qui s0 contiene il numero della lampada, srl scorre la parola dei pulsanti, andi isola il bit, e il colore si sceglie di conseguenza: grigio per spenta, giallo per accesa. Scorrere e mascherare è uno degli idiomi più comuni della programmazione a basso livello.
+DA COMPRENDERE OGGI: le maschere di bit.
 Per il docente: Sorgente: laboratorio 06-asm-state-and-input del libro di PRG32, step1_lamps.S (dentro lamp_loop). srl è uno scorrimento logico a destra (Lezione 05).</a:t>
             </a:r>
             <a:endParaRPr lang="en-US" dirty="0"/>
@@ -2265,6 +2282,7 @@
             <a:r>
               <a:rPr lang="en-US" dirty="0"/>
               <a:t>Una pagina del programma completo, esattamente com'è nel repository. Leggetelo dall'inizio: l'intestazione dice che cosa mostra il programma e come compilarlo; seguono le tre funzioni init, update e draw, poi i dati. Le righe incontrate nei listati della lezione hanno qui gli stessi commenti.
+DA UTILIZZARE OGGI: il programma completo (si usa, non si studia, in questo corso).
 Per il docente: code/l08.S, come viene compilato ed eseguito dai test. I commenti fanno parte del programma, e sono in inglese come in tutti i listati: leggeteli con il codice.</a:t>
             </a:r>
             <a:endParaRPr lang="en-US" dirty="0"/>
@@ -3346,6 +3364,420 @@
       </p:pic>
       <p:sp>
         <p:nvSpPr>
+          <p:cNvPr id="14" name="Shape 11"/>
+          <p:cNvSpPr/>
+          <p:nvPr/>
+        </p:nvSpPr>
+        <p:spPr>
+          <a:xfrm>
+            <a:off x="8910777" y="91440"/>
+            <a:ext cx="2732278" cy="274320"/>
+          </a:xfrm>
+          <a:prstGeom prst="rect">
+            <a:avLst/>
+          </a:prstGeom>
+          <a:solidFill>
+            <a:srgbClr val="F3E8FF"/>
+          </a:solidFill>
+          <a:ln w="12700">
+            <a:solidFill>
+              <a:srgbClr val="7E22CE"/>
+            </a:solidFill>
+            <a:prstDash val="dash"/>
+          </a:ln>
+        </p:spPr>
+      </p:sp>
+      <p:sp>
+        <p:nvSpPr>
+          <p:cNvPr id="15" name="Shape 12"/>
+          <p:cNvSpPr/>
+          <p:nvPr/>
+        </p:nvSpPr>
+        <p:spPr>
+          <a:xfrm>
+            <a:off x="8938209" y="128016"/>
+            <a:ext cx="45720" cy="45720"/>
+          </a:xfrm>
+          <a:prstGeom prst="rect">
+            <a:avLst/>
+          </a:prstGeom>
+          <a:solidFill>
+            <a:srgbClr val="7E22CE"/>
+          </a:solidFill>
+          <a:ln w="12700">
+            <a:solidFill>
+              <a:srgbClr val="7E22CE"/>
+            </a:solidFill>
+            <a:prstDash val="solid"/>
+          </a:ln>
+        </p:spPr>
+      </p:sp>
+      <p:sp>
+        <p:nvSpPr>
+          <p:cNvPr id="16" name="Shape 13"/>
+          <p:cNvSpPr/>
+          <p:nvPr/>
+        </p:nvSpPr>
+        <p:spPr>
+          <a:xfrm>
+            <a:off x="8938209" y="205740"/>
+            <a:ext cx="45720" cy="45720"/>
+          </a:xfrm>
+          <a:prstGeom prst="rect">
+            <a:avLst/>
+          </a:prstGeom>
+          <a:solidFill>
+            <a:srgbClr val="7E22CE"/>
+          </a:solidFill>
+          <a:ln w="12700">
+            <a:solidFill>
+              <a:srgbClr val="7E22CE"/>
+            </a:solidFill>
+            <a:prstDash val="solid"/>
+          </a:ln>
+        </p:spPr>
+      </p:sp>
+      <p:sp>
+        <p:nvSpPr>
+          <p:cNvPr id="17" name="Shape 14"/>
+          <p:cNvSpPr/>
+          <p:nvPr/>
+        </p:nvSpPr>
+        <p:spPr>
+          <a:xfrm>
+            <a:off x="8938209" y="283464"/>
+            <a:ext cx="45720" cy="45720"/>
+          </a:xfrm>
+          <a:prstGeom prst="rect">
+            <a:avLst/>
+          </a:prstGeom>
+          <a:solidFill>
+            <a:srgbClr val="7E22CE"/>
+          </a:solidFill>
+          <a:ln w="12700">
+            <a:solidFill>
+              <a:srgbClr val="7E22CE"/>
+            </a:solidFill>
+            <a:prstDash val="solid"/>
+          </a:ln>
+        </p:spPr>
+      </p:sp>
+      <p:pic>
+        <p:nvPicPr>
+          <p:cNvPr id="18" name="Image 1" descr="preencoded.png">    </p:cNvPr>
+          <p:cNvPicPr>
+            <a:picLocks noChangeAspect="1"/>
+          </p:cNvPicPr>
+          <p:nvPr/>
+        </p:nvPicPr>
+        <p:blipFill>
+          <a:blip r:embed="rId2"/>
+          <a:stretch>
+            <a:fillRect/>
+          </a:stretch>
+        </p:blipFill>
+        <p:spPr>
+          <a:xfrm>
+            <a:off x="9038793" y="128016"/>
+            <a:ext cx="201168" cy="201168"/>
+          </a:xfrm>
+          <a:prstGeom prst="rect">
+            <a:avLst/>
+          </a:prstGeom>
+        </p:spPr>
+      </p:pic>
+      <p:sp>
+        <p:nvSpPr>
+          <p:cNvPr id="19" name="Text 15"/>
+          <p:cNvSpPr txBox="1"/>
+          <p:nvPr/>
+        </p:nvSpPr>
+        <p:spPr>
+          <a:xfrm>
+            <a:off x="9294825" y="91440"/>
+            <a:ext cx="2311654" cy="274320"/>
+          </a:xfrm>
+          <a:prstGeom prst="rect">
+            <a:avLst/>
+          </a:prstGeom>
+          <a:noFill/>
+          <a:ln/>
+        </p:spPr>
+        <p:txBody>
+          <a:bodyPr wrap="square" lIns="0" tIns="0" rIns="0" bIns="0" rtlCol="0" anchor="ctr"/>
+          <a:lstStyle/>
+          <a:p>
+            <a:pPr indent="0" marL="0">
+              <a:buNone/>
+            </a:pPr>
+            <a:r>
+              <a:rPr lang="en-US" sz="1100" b="1" dirty="0">
+                <a:solidFill>
+                  <a:srgbClr val="6B21A8"/>
+                </a:solidFill>
+                <a:latin typeface="Calibri" pitchFamily="34" charset="0"/>
+                <a:ea typeface="Calibri" pitchFamily="34" charset="-122"/>
+                <a:cs typeface="Calibri" pitchFamily="34" charset="-120"/>
+              </a:rPr>
+              <a:t>DA COMPRENDERE PIÙ AVANTI</a:t>
+            </a:r>
+            <a:endParaRPr lang="en-US" sz="1100" dirty="0"/>
+          </a:p>
+        </p:txBody>
+      </p:sp>
+      <p:sp>
+        <p:nvSpPr>
+          <p:cNvPr id="20" name="Shape 16"/>
+          <p:cNvSpPr/>
+          <p:nvPr/>
+        </p:nvSpPr>
+        <p:spPr>
+          <a:xfrm>
+            <a:off x="6675069" y="91440"/>
+            <a:ext cx="2125980" cy="274320"/>
+          </a:xfrm>
+          <a:prstGeom prst="rect">
+            <a:avLst/>
+          </a:prstGeom>
+          <a:solidFill>
+            <a:srgbClr val="FEF3C7"/>
+          </a:solidFill>
+          <a:ln w="12700">
+            <a:solidFill>
+              <a:srgbClr val="B45309"/>
+            </a:solidFill>
+            <a:prstDash val="solid"/>
+          </a:ln>
+        </p:spPr>
+      </p:sp>
+      <p:sp>
+        <p:nvSpPr>
+          <p:cNvPr id="21" name="Shape 17"/>
+          <p:cNvSpPr/>
+          <p:nvPr/>
+        </p:nvSpPr>
+        <p:spPr>
+          <a:xfrm>
+            <a:off x="6675069" y="91440"/>
+            <a:ext cx="27432" cy="274320"/>
+          </a:xfrm>
+          <a:prstGeom prst="rect">
+            <a:avLst/>
+          </a:prstGeom>
+          <a:solidFill>
+            <a:srgbClr val="B45309"/>
+          </a:solidFill>
+          <a:ln w="12700">
+            <a:solidFill>
+              <a:srgbClr val="B45309"/>
+            </a:solidFill>
+            <a:prstDash val="solid"/>
+          </a:ln>
+        </p:spPr>
+      </p:sp>
+      <p:sp>
+        <p:nvSpPr>
+          <p:cNvPr id="22" name="Shape 18"/>
+          <p:cNvSpPr/>
+          <p:nvPr/>
+        </p:nvSpPr>
+        <p:spPr>
+          <a:xfrm>
+            <a:off x="6729933" y="91440"/>
+            <a:ext cx="27432" cy="274320"/>
+          </a:xfrm>
+          <a:prstGeom prst="rect">
+            <a:avLst/>
+          </a:prstGeom>
+          <a:solidFill>
+            <a:srgbClr val="B45309"/>
+          </a:solidFill>
+          <a:ln w="12700">
+            <a:solidFill>
+              <a:srgbClr val="B45309"/>
+            </a:solidFill>
+            <a:prstDash val="solid"/>
+          </a:ln>
+        </p:spPr>
+      </p:sp>
+      <p:pic>
+        <p:nvPicPr>
+          <p:cNvPr id="23" name="Image 2" descr="preencoded.png">    </p:cNvPr>
+          <p:cNvPicPr>
+            <a:picLocks noChangeAspect="1"/>
+          </p:cNvPicPr>
+          <p:nvPr/>
+        </p:nvPicPr>
+        <p:blipFill>
+          <a:blip r:embed="rId3"/>
+          <a:stretch>
+            <a:fillRect/>
+          </a:stretch>
+        </p:blipFill>
+        <p:spPr>
+          <a:xfrm>
+            <a:off x="6803085" y="128016"/>
+            <a:ext cx="201168" cy="201168"/>
+          </a:xfrm>
+          <a:prstGeom prst="rect">
+            <a:avLst/>
+          </a:prstGeom>
+        </p:spPr>
+      </p:pic>
+      <p:sp>
+        <p:nvSpPr>
+          <p:cNvPr id="24" name="Text 19"/>
+          <p:cNvSpPr txBox="1"/>
+          <p:nvPr/>
+        </p:nvSpPr>
+        <p:spPr>
+          <a:xfrm>
+            <a:off x="7059117" y="91440"/>
+            <a:ext cx="1705356" cy="274320"/>
+          </a:xfrm>
+          <a:prstGeom prst="rect">
+            <a:avLst/>
+          </a:prstGeom>
+          <a:noFill/>
+          <a:ln/>
+        </p:spPr>
+        <p:txBody>
+          <a:bodyPr wrap="square" lIns="0" tIns="0" rIns="0" bIns="0" rtlCol="0" anchor="ctr"/>
+          <a:lstStyle/>
+          <a:p>
+            <a:pPr indent="0" marL="0">
+              <a:buNone/>
+            </a:pPr>
+            <a:r>
+              <a:rPr lang="en-US" sz="1100" b="1" dirty="0">
+                <a:solidFill>
+                  <a:srgbClr val="92400E"/>
+                </a:solidFill>
+                <a:latin typeface="Calibri" pitchFamily="34" charset="0"/>
+                <a:ea typeface="Calibri" pitchFamily="34" charset="-122"/>
+                <a:cs typeface="Calibri" pitchFamily="34" charset="-120"/>
+              </a:rPr>
+              <a:t>DA UTILIZZARE OGGI</a:t>
+            </a:r>
+            <a:endParaRPr lang="en-US" sz="1100" dirty="0"/>
+          </a:p>
+        </p:txBody>
+      </p:sp>
+      <p:sp>
+        <p:nvSpPr>
+          <p:cNvPr id="25" name="Shape 20"/>
+          <p:cNvSpPr/>
+          <p:nvPr/>
+        </p:nvSpPr>
+        <p:spPr>
+          <a:xfrm>
+            <a:off x="4352747" y="91440"/>
+            <a:ext cx="2212594" cy="274320"/>
+          </a:xfrm>
+          <a:prstGeom prst="rect">
+            <a:avLst/>
+          </a:prstGeom>
+          <a:solidFill>
+            <a:srgbClr val="E0F2FE"/>
+          </a:solidFill>
+          <a:ln w="12700">
+            <a:solidFill>
+              <a:srgbClr val="0369A1"/>
+            </a:solidFill>
+            <a:prstDash val="solid"/>
+          </a:ln>
+        </p:spPr>
+      </p:sp>
+      <p:sp>
+        <p:nvSpPr>
+          <p:cNvPr id="26" name="Shape 21"/>
+          <p:cNvSpPr/>
+          <p:nvPr/>
+        </p:nvSpPr>
+        <p:spPr>
+          <a:xfrm>
+            <a:off x="4352747" y="91440"/>
+            <a:ext cx="73152" cy="274320"/>
+          </a:xfrm>
+          <a:prstGeom prst="rect">
+            <a:avLst/>
+          </a:prstGeom>
+          <a:solidFill>
+            <a:srgbClr val="0369A1"/>
+          </a:solidFill>
+          <a:ln w="12700">
+            <a:solidFill>
+              <a:srgbClr val="0369A1"/>
+            </a:solidFill>
+            <a:prstDash val="solid"/>
+          </a:ln>
+        </p:spPr>
+      </p:sp>
+      <p:pic>
+        <p:nvPicPr>
+          <p:cNvPr id="27" name="Image 3" descr="preencoded.png">    </p:cNvPr>
+          <p:cNvPicPr>
+            <a:picLocks noChangeAspect="1"/>
+          </p:cNvPicPr>
+          <p:nvPr/>
+        </p:nvPicPr>
+        <p:blipFill>
+          <a:blip r:embed="rId4"/>
+          <a:stretch>
+            <a:fillRect/>
+          </a:stretch>
+        </p:blipFill>
+        <p:spPr>
+          <a:xfrm>
+            <a:off x="4480763" y="128016"/>
+            <a:ext cx="201168" cy="201168"/>
+          </a:xfrm>
+          <a:prstGeom prst="rect">
+            <a:avLst/>
+          </a:prstGeom>
+        </p:spPr>
+      </p:pic>
+      <p:sp>
+        <p:nvSpPr>
+          <p:cNvPr id="28" name="Text 22"/>
+          <p:cNvSpPr txBox="1"/>
+          <p:nvPr/>
+        </p:nvSpPr>
+        <p:spPr>
+          <a:xfrm>
+            <a:off x="4736795" y="91440"/>
+            <a:ext cx="1791970" cy="274320"/>
+          </a:xfrm>
+          <a:prstGeom prst="rect">
+            <a:avLst/>
+          </a:prstGeom>
+          <a:noFill/>
+          <a:ln/>
+        </p:spPr>
+        <p:txBody>
+          <a:bodyPr wrap="square" lIns="0" tIns="0" rIns="0" bIns="0" rtlCol="0" anchor="ctr"/>
+          <a:lstStyle/>
+          <a:p>
+            <a:pPr indent="0" marL="0">
+              <a:buNone/>
+            </a:pPr>
+            <a:r>
+              <a:rPr lang="en-US" sz="1100" b="1" dirty="0">
+                <a:solidFill>
+                  <a:srgbClr val="075985"/>
+                </a:solidFill>
+                <a:latin typeface="Calibri" pitchFamily="34" charset="0"/>
+                <a:ea typeface="Calibri" pitchFamily="34" charset="-122"/>
+                <a:cs typeface="Calibri" pitchFamily="34" charset="-120"/>
+              </a:rPr>
+              <a:t>DA COMPRENDERE OGGI</a:t>
+            </a:r>
+            <a:endParaRPr lang="en-US" sz="1100" dirty="0"/>
+          </a:p>
+        </p:txBody>
+      </p:sp>
+      <p:sp>
+        <p:nvSpPr>
           <p:cNvPr id="25" name="Slide Number Placeholder 0"/>
           <p:cNvSpPr>
             <a:spLocks noGrp="1"/>
@@ -3995,6 +4427,158 @@
       </p:sp>
       <p:sp>
         <p:nvSpPr>
+          <p:cNvPr id="5" name="Shape 3"/>
+          <p:cNvSpPr/>
+          <p:nvPr/>
+        </p:nvSpPr>
+        <p:spPr>
+          <a:xfrm>
+            <a:off x="7941259" y="91440"/>
+            <a:ext cx="3701796" cy="274320"/>
+          </a:xfrm>
+          <a:prstGeom prst="rect">
+            <a:avLst/>
+          </a:prstGeom>
+          <a:solidFill>
+            <a:srgbClr val="FEF3C7"/>
+          </a:solidFill>
+          <a:ln w="12700">
+            <a:solidFill>
+              <a:srgbClr val="B45309"/>
+            </a:solidFill>
+            <a:prstDash val="solid"/>
+          </a:ln>
+        </p:spPr>
+      </p:sp>
+      <p:sp>
+        <p:nvSpPr>
+          <p:cNvPr id="6" name="Shape 4"/>
+          <p:cNvSpPr/>
+          <p:nvPr/>
+        </p:nvSpPr>
+        <p:spPr>
+          <a:xfrm>
+            <a:off x="7941259" y="91440"/>
+            <a:ext cx="27432" cy="274320"/>
+          </a:xfrm>
+          <a:prstGeom prst="rect">
+            <a:avLst/>
+          </a:prstGeom>
+          <a:solidFill>
+            <a:srgbClr val="B45309"/>
+          </a:solidFill>
+          <a:ln w="12700">
+            <a:solidFill>
+              <a:srgbClr val="B45309"/>
+            </a:solidFill>
+            <a:prstDash val="solid"/>
+          </a:ln>
+        </p:spPr>
+      </p:sp>
+      <p:sp>
+        <p:nvSpPr>
+          <p:cNvPr id="7" name="Shape 5"/>
+          <p:cNvSpPr/>
+          <p:nvPr/>
+        </p:nvSpPr>
+        <p:spPr>
+          <a:xfrm>
+            <a:off x="7996123" y="91440"/>
+            <a:ext cx="27432" cy="274320"/>
+          </a:xfrm>
+          <a:prstGeom prst="rect">
+            <a:avLst/>
+          </a:prstGeom>
+          <a:solidFill>
+            <a:srgbClr val="B45309"/>
+          </a:solidFill>
+          <a:ln w="12700">
+            <a:solidFill>
+              <a:srgbClr val="B45309"/>
+            </a:solidFill>
+            <a:prstDash val="solid"/>
+          </a:ln>
+        </p:spPr>
+      </p:sp>
+      <p:pic>
+        <p:nvPicPr>
+          <p:cNvPr id="8" name="Image 0" descr="preencoded.png">    </p:cNvPr>
+          <p:cNvPicPr>
+            <a:picLocks noChangeAspect="1"/>
+          </p:cNvPicPr>
+          <p:nvPr/>
+        </p:nvPicPr>
+        <p:blipFill>
+          <a:blip r:embed="rId1"/>
+          <a:stretch>
+            <a:fillRect/>
+          </a:stretch>
+        </p:blipFill>
+        <p:spPr>
+          <a:xfrm>
+            <a:off x="8069275" y="128016"/>
+            <a:ext cx="201168" cy="201168"/>
+          </a:xfrm>
+          <a:prstGeom prst="rect">
+            <a:avLst/>
+          </a:prstGeom>
+        </p:spPr>
+      </p:pic>
+      <p:sp>
+        <p:nvSpPr>
+          <p:cNvPr id="9" name="Text 6"/>
+          <p:cNvSpPr txBox="1"/>
+          <p:nvPr/>
+        </p:nvSpPr>
+        <p:spPr>
+          <a:xfrm>
+            <a:off x="8325307" y="91440"/>
+            <a:ext cx="3281172" cy="274320"/>
+          </a:xfrm>
+          <a:prstGeom prst="rect">
+            <a:avLst/>
+          </a:prstGeom>
+          <a:noFill/>
+          <a:ln/>
+        </p:spPr>
+        <p:txBody>
+          <a:bodyPr wrap="square" lIns="0" tIns="0" rIns="0" bIns="0" rtlCol="0" anchor="ctr"/>
+          <a:lstStyle/>
+          <a:p>
+            <a:pPr indent="0" marL="0">
+              <a:buNone/>
+            </a:pPr>
+            <a:r>
+              <a:rPr lang="en-US" sz="1100" b="1" dirty="0">
+                <a:solidFill>
+                  <a:srgbClr val="92400E"/>
+                </a:solidFill>
+                <a:latin typeface="Calibri" pitchFamily="34" charset="0"/>
+                <a:ea typeface="Calibri" pitchFamily="34" charset="-122"/>
+                <a:cs typeface="Calibri" pitchFamily="34" charset="-120"/>
+              </a:rPr>
+              <a:t>DA UTILIZZARE OGGI</a:t>
+            </a:r>
+            <a:pPr indent="0" marL="0">
+              <a:buNone/>
+            </a:pPr>
+            <a:r>
+              <a:rPr lang="en-US" sz="1100" dirty="0">
+                <a:solidFill>
+                  <a:srgbClr val="92400E"/>
+                </a:solidFill>
+                <a:latin typeface="Calibri" pitchFamily="34" charset="0"/>
+                <a:ea typeface="Calibri" pitchFamily="34" charset="-122"/>
+                <a:cs typeface="Calibri" pitchFamily="34" charset="-120"/>
+              </a:rPr>
+              <a:t> · il programma completo</a:t>
+            </a:r>
+            <a:endParaRPr lang="en-US" sz="1100" dirty="0"/>
+          </a:p>
+        </p:txBody>
+      </p:sp>
+      <p:sp>
+        <p:nvSpPr>
           <p:cNvPr id="25" name="Slide Number Placeholder 0"/>
           <p:cNvSpPr>
             <a:spLocks noGrp="1"/>
@@ -4384,6 +4968,158 @@
       </p:sp>
       <p:sp>
         <p:nvSpPr>
+          <p:cNvPr id="5" name="Shape 3"/>
+          <p:cNvSpPr/>
+          <p:nvPr/>
+        </p:nvSpPr>
+        <p:spPr>
+          <a:xfrm>
+            <a:off x="7941259" y="91440"/>
+            <a:ext cx="3701796" cy="274320"/>
+          </a:xfrm>
+          <a:prstGeom prst="rect">
+            <a:avLst/>
+          </a:prstGeom>
+          <a:solidFill>
+            <a:srgbClr val="FEF3C7"/>
+          </a:solidFill>
+          <a:ln w="12700">
+            <a:solidFill>
+              <a:srgbClr val="B45309"/>
+            </a:solidFill>
+            <a:prstDash val="solid"/>
+          </a:ln>
+        </p:spPr>
+      </p:sp>
+      <p:sp>
+        <p:nvSpPr>
+          <p:cNvPr id="6" name="Shape 4"/>
+          <p:cNvSpPr/>
+          <p:nvPr/>
+        </p:nvSpPr>
+        <p:spPr>
+          <a:xfrm>
+            <a:off x="7941259" y="91440"/>
+            <a:ext cx="27432" cy="274320"/>
+          </a:xfrm>
+          <a:prstGeom prst="rect">
+            <a:avLst/>
+          </a:prstGeom>
+          <a:solidFill>
+            <a:srgbClr val="B45309"/>
+          </a:solidFill>
+          <a:ln w="12700">
+            <a:solidFill>
+              <a:srgbClr val="B45309"/>
+            </a:solidFill>
+            <a:prstDash val="solid"/>
+          </a:ln>
+        </p:spPr>
+      </p:sp>
+      <p:sp>
+        <p:nvSpPr>
+          <p:cNvPr id="7" name="Shape 5"/>
+          <p:cNvSpPr/>
+          <p:nvPr/>
+        </p:nvSpPr>
+        <p:spPr>
+          <a:xfrm>
+            <a:off x="7996123" y="91440"/>
+            <a:ext cx="27432" cy="274320"/>
+          </a:xfrm>
+          <a:prstGeom prst="rect">
+            <a:avLst/>
+          </a:prstGeom>
+          <a:solidFill>
+            <a:srgbClr val="B45309"/>
+          </a:solidFill>
+          <a:ln w="12700">
+            <a:solidFill>
+              <a:srgbClr val="B45309"/>
+            </a:solidFill>
+            <a:prstDash val="solid"/>
+          </a:ln>
+        </p:spPr>
+      </p:sp>
+      <p:pic>
+        <p:nvPicPr>
+          <p:cNvPr id="8" name="Image 0" descr="preencoded.png">    </p:cNvPr>
+          <p:cNvPicPr>
+            <a:picLocks noChangeAspect="1"/>
+          </p:cNvPicPr>
+          <p:nvPr/>
+        </p:nvPicPr>
+        <p:blipFill>
+          <a:blip r:embed="rId1"/>
+          <a:stretch>
+            <a:fillRect/>
+          </a:stretch>
+        </p:blipFill>
+        <p:spPr>
+          <a:xfrm>
+            <a:off x="8069275" y="128016"/>
+            <a:ext cx="201168" cy="201168"/>
+          </a:xfrm>
+          <a:prstGeom prst="rect">
+            <a:avLst/>
+          </a:prstGeom>
+        </p:spPr>
+      </p:pic>
+      <p:sp>
+        <p:nvSpPr>
+          <p:cNvPr id="9" name="Text 6"/>
+          <p:cNvSpPr txBox="1"/>
+          <p:nvPr/>
+        </p:nvSpPr>
+        <p:spPr>
+          <a:xfrm>
+            <a:off x="8325307" y="91440"/>
+            <a:ext cx="3281172" cy="274320"/>
+          </a:xfrm>
+          <a:prstGeom prst="rect">
+            <a:avLst/>
+          </a:prstGeom>
+          <a:noFill/>
+          <a:ln/>
+        </p:spPr>
+        <p:txBody>
+          <a:bodyPr wrap="square" lIns="0" tIns="0" rIns="0" bIns="0" rtlCol="0" anchor="ctr"/>
+          <a:lstStyle/>
+          <a:p>
+            <a:pPr indent="0" marL="0">
+              <a:buNone/>
+            </a:pPr>
+            <a:r>
+              <a:rPr lang="en-US" sz="1100" b="1" dirty="0">
+                <a:solidFill>
+                  <a:srgbClr val="92400E"/>
+                </a:solidFill>
+                <a:latin typeface="Calibri" pitchFamily="34" charset="0"/>
+                <a:ea typeface="Calibri" pitchFamily="34" charset="-122"/>
+                <a:cs typeface="Calibri" pitchFamily="34" charset="-120"/>
+              </a:rPr>
+              <a:t>DA UTILIZZARE OGGI</a:t>
+            </a:r>
+            <a:pPr indent="0" marL="0">
+              <a:buNone/>
+            </a:pPr>
+            <a:r>
+              <a:rPr lang="en-US" sz="1100" dirty="0">
+                <a:solidFill>
+                  <a:srgbClr val="92400E"/>
+                </a:solidFill>
+                <a:latin typeface="Calibri" pitchFamily="34" charset="0"/>
+                <a:ea typeface="Calibri" pitchFamily="34" charset="-122"/>
+                <a:cs typeface="Calibri" pitchFamily="34" charset="-120"/>
+              </a:rPr>
+              <a:t> · il programma completo</a:t>
+            </a:r>
+            <a:endParaRPr lang="en-US" sz="1100" dirty="0"/>
+          </a:p>
+        </p:txBody>
+      </p:sp>
+      <p:sp>
+        <p:nvSpPr>
           <p:cNvPr id="25" name="Slide Number Placeholder 0"/>
           <p:cNvSpPr>
             <a:spLocks noGrp="1"/>
@@ -5036,6 +5772,158 @@
       </p:sp>
       <p:sp>
         <p:nvSpPr>
+          <p:cNvPr id="5" name="Shape 3"/>
+          <p:cNvSpPr/>
+          <p:nvPr/>
+        </p:nvSpPr>
+        <p:spPr>
+          <a:xfrm>
+            <a:off x="7941259" y="91440"/>
+            <a:ext cx="3701796" cy="274320"/>
+          </a:xfrm>
+          <a:prstGeom prst="rect">
+            <a:avLst/>
+          </a:prstGeom>
+          <a:solidFill>
+            <a:srgbClr val="FEF3C7"/>
+          </a:solidFill>
+          <a:ln w="12700">
+            <a:solidFill>
+              <a:srgbClr val="B45309"/>
+            </a:solidFill>
+            <a:prstDash val="solid"/>
+          </a:ln>
+        </p:spPr>
+      </p:sp>
+      <p:sp>
+        <p:nvSpPr>
+          <p:cNvPr id="6" name="Shape 4"/>
+          <p:cNvSpPr/>
+          <p:nvPr/>
+        </p:nvSpPr>
+        <p:spPr>
+          <a:xfrm>
+            <a:off x="7941259" y="91440"/>
+            <a:ext cx="27432" cy="274320"/>
+          </a:xfrm>
+          <a:prstGeom prst="rect">
+            <a:avLst/>
+          </a:prstGeom>
+          <a:solidFill>
+            <a:srgbClr val="B45309"/>
+          </a:solidFill>
+          <a:ln w="12700">
+            <a:solidFill>
+              <a:srgbClr val="B45309"/>
+            </a:solidFill>
+            <a:prstDash val="solid"/>
+          </a:ln>
+        </p:spPr>
+      </p:sp>
+      <p:sp>
+        <p:nvSpPr>
+          <p:cNvPr id="7" name="Shape 5"/>
+          <p:cNvSpPr/>
+          <p:nvPr/>
+        </p:nvSpPr>
+        <p:spPr>
+          <a:xfrm>
+            <a:off x="7996123" y="91440"/>
+            <a:ext cx="27432" cy="274320"/>
+          </a:xfrm>
+          <a:prstGeom prst="rect">
+            <a:avLst/>
+          </a:prstGeom>
+          <a:solidFill>
+            <a:srgbClr val="B45309"/>
+          </a:solidFill>
+          <a:ln w="12700">
+            <a:solidFill>
+              <a:srgbClr val="B45309"/>
+            </a:solidFill>
+            <a:prstDash val="solid"/>
+          </a:ln>
+        </p:spPr>
+      </p:sp>
+      <p:pic>
+        <p:nvPicPr>
+          <p:cNvPr id="8" name="Image 0" descr="preencoded.png">    </p:cNvPr>
+          <p:cNvPicPr>
+            <a:picLocks noChangeAspect="1"/>
+          </p:cNvPicPr>
+          <p:nvPr/>
+        </p:nvPicPr>
+        <p:blipFill>
+          <a:blip r:embed="rId1"/>
+          <a:stretch>
+            <a:fillRect/>
+          </a:stretch>
+        </p:blipFill>
+        <p:spPr>
+          <a:xfrm>
+            <a:off x="8069275" y="128016"/>
+            <a:ext cx="201168" cy="201168"/>
+          </a:xfrm>
+          <a:prstGeom prst="rect">
+            <a:avLst/>
+          </a:prstGeom>
+        </p:spPr>
+      </p:pic>
+      <p:sp>
+        <p:nvSpPr>
+          <p:cNvPr id="9" name="Text 6"/>
+          <p:cNvSpPr txBox="1"/>
+          <p:nvPr/>
+        </p:nvSpPr>
+        <p:spPr>
+          <a:xfrm>
+            <a:off x="8325307" y="91440"/>
+            <a:ext cx="3281172" cy="274320"/>
+          </a:xfrm>
+          <a:prstGeom prst="rect">
+            <a:avLst/>
+          </a:prstGeom>
+          <a:noFill/>
+          <a:ln/>
+        </p:spPr>
+        <p:txBody>
+          <a:bodyPr wrap="square" lIns="0" tIns="0" rIns="0" bIns="0" rtlCol="0" anchor="ctr"/>
+          <a:lstStyle/>
+          <a:p>
+            <a:pPr indent="0" marL="0">
+              <a:buNone/>
+            </a:pPr>
+            <a:r>
+              <a:rPr lang="en-US" sz="1100" b="1" dirty="0">
+                <a:solidFill>
+                  <a:srgbClr val="92400E"/>
+                </a:solidFill>
+                <a:latin typeface="Calibri" pitchFamily="34" charset="0"/>
+                <a:ea typeface="Calibri" pitchFamily="34" charset="-122"/>
+                <a:cs typeface="Calibri" pitchFamily="34" charset="-120"/>
+              </a:rPr>
+              <a:t>DA UTILIZZARE OGGI</a:t>
+            </a:r>
+            <a:pPr indent="0" marL="0">
+              <a:buNone/>
+            </a:pPr>
+            <a:r>
+              <a:rPr lang="en-US" sz="1100" dirty="0">
+                <a:solidFill>
+                  <a:srgbClr val="92400E"/>
+                </a:solidFill>
+                <a:latin typeface="Calibri" pitchFamily="34" charset="0"/>
+                <a:ea typeface="Calibri" pitchFamily="34" charset="-122"/>
+                <a:cs typeface="Calibri" pitchFamily="34" charset="-120"/>
+              </a:rPr>
+              <a:t> · il programma completo</a:t>
+            </a:r>
+            <a:endParaRPr lang="en-US" sz="1100" dirty="0"/>
+          </a:p>
+        </p:txBody>
+      </p:sp>
+      <p:sp>
+        <p:nvSpPr>
           <p:cNvPr id="25" name="Slide Number Placeholder 0"/>
           <p:cNvSpPr>
             <a:spLocks noGrp="1"/>
@@ -5601,6 +6489,158 @@
       </p:sp>
       <p:sp>
         <p:nvSpPr>
+          <p:cNvPr id="5" name="Shape 3"/>
+          <p:cNvSpPr/>
+          <p:nvPr/>
+        </p:nvSpPr>
+        <p:spPr>
+          <a:xfrm>
+            <a:off x="7941259" y="91440"/>
+            <a:ext cx="3701796" cy="274320"/>
+          </a:xfrm>
+          <a:prstGeom prst="rect">
+            <a:avLst/>
+          </a:prstGeom>
+          <a:solidFill>
+            <a:srgbClr val="FEF3C7"/>
+          </a:solidFill>
+          <a:ln w="12700">
+            <a:solidFill>
+              <a:srgbClr val="B45309"/>
+            </a:solidFill>
+            <a:prstDash val="solid"/>
+          </a:ln>
+        </p:spPr>
+      </p:sp>
+      <p:sp>
+        <p:nvSpPr>
+          <p:cNvPr id="6" name="Shape 4"/>
+          <p:cNvSpPr/>
+          <p:nvPr/>
+        </p:nvSpPr>
+        <p:spPr>
+          <a:xfrm>
+            <a:off x="7941259" y="91440"/>
+            <a:ext cx="27432" cy="274320"/>
+          </a:xfrm>
+          <a:prstGeom prst="rect">
+            <a:avLst/>
+          </a:prstGeom>
+          <a:solidFill>
+            <a:srgbClr val="B45309"/>
+          </a:solidFill>
+          <a:ln w="12700">
+            <a:solidFill>
+              <a:srgbClr val="B45309"/>
+            </a:solidFill>
+            <a:prstDash val="solid"/>
+          </a:ln>
+        </p:spPr>
+      </p:sp>
+      <p:sp>
+        <p:nvSpPr>
+          <p:cNvPr id="7" name="Shape 5"/>
+          <p:cNvSpPr/>
+          <p:nvPr/>
+        </p:nvSpPr>
+        <p:spPr>
+          <a:xfrm>
+            <a:off x="7996123" y="91440"/>
+            <a:ext cx="27432" cy="274320"/>
+          </a:xfrm>
+          <a:prstGeom prst="rect">
+            <a:avLst/>
+          </a:prstGeom>
+          <a:solidFill>
+            <a:srgbClr val="B45309"/>
+          </a:solidFill>
+          <a:ln w="12700">
+            <a:solidFill>
+              <a:srgbClr val="B45309"/>
+            </a:solidFill>
+            <a:prstDash val="solid"/>
+          </a:ln>
+        </p:spPr>
+      </p:sp>
+      <p:pic>
+        <p:nvPicPr>
+          <p:cNvPr id="8" name="Image 0" descr="preencoded.png">    </p:cNvPr>
+          <p:cNvPicPr>
+            <a:picLocks noChangeAspect="1"/>
+          </p:cNvPicPr>
+          <p:nvPr/>
+        </p:nvPicPr>
+        <p:blipFill>
+          <a:blip r:embed="rId1"/>
+          <a:stretch>
+            <a:fillRect/>
+          </a:stretch>
+        </p:blipFill>
+        <p:spPr>
+          <a:xfrm>
+            <a:off x="8069275" y="128016"/>
+            <a:ext cx="201168" cy="201168"/>
+          </a:xfrm>
+          <a:prstGeom prst="rect">
+            <a:avLst/>
+          </a:prstGeom>
+        </p:spPr>
+      </p:pic>
+      <p:sp>
+        <p:nvSpPr>
+          <p:cNvPr id="9" name="Text 6"/>
+          <p:cNvSpPr txBox="1"/>
+          <p:nvPr/>
+        </p:nvSpPr>
+        <p:spPr>
+          <a:xfrm>
+            <a:off x="8325307" y="91440"/>
+            <a:ext cx="3281172" cy="274320"/>
+          </a:xfrm>
+          <a:prstGeom prst="rect">
+            <a:avLst/>
+          </a:prstGeom>
+          <a:noFill/>
+          <a:ln/>
+        </p:spPr>
+        <p:txBody>
+          <a:bodyPr wrap="square" lIns="0" tIns="0" rIns="0" bIns="0" rtlCol="0" anchor="ctr"/>
+          <a:lstStyle/>
+          <a:p>
+            <a:pPr indent="0" marL="0">
+              <a:buNone/>
+            </a:pPr>
+            <a:r>
+              <a:rPr lang="en-US" sz="1100" b="1" dirty="0">
+                <a:solidFill>
+                  <a:srgbClr val="92400E"/>
+                </a:solidFill>
+                <a:latin typeface="Calibri" pitchFamily="34" charset="0"/>
+                <a:ea typeface="Calibri" pitchFamily="34" charset="-122"/>
+                <a:cs typeface="Calibri" pitchFamily="34" charset="-120"/>
+              </a:rPr>
+              <a:t>DA UTILIZZARE OGGI</a:t>
+            </a:r>
+            <a:pPr indent="0" marL="0">
+              <a:buNone/>
+            </a:pPr>
+            <a:r>
+              <a:rPr lang="en-US" sz="1100" dirty="0">
+                <a:solidFill>
+                  <a:srgbClr val="92400E"/>
+                </a:solidFill>
+                <a:latin typeface="Calibri" pitchFamily="34" charset="0"/>
+                <a:ea typeface="Calibri" pitchFamily="34" charset="-122"/>
+                <a:cs typeface="Calibri" pitchFamily="34" charset="-120"/>
+              </a:rPr>
+              <a:t> · il programma completo</a:t>
+            </a:r>
+            <a:endParaRPr lang="en-US" sz="1100" dirty="0"/>
+          </a:p>
+        </p:txBody>
+      </p:sp>
+      <p:sp>
+        <p:nvSpPr>
           <p:cNvPr id="25" name="Slide Number Placeholder 0"/>
           <p:cNvSpPr>
             <a:spLocks noGrp="1"/>
@@ -5832,6 +6872,158 @@
       </p:sp>
       <p:sp>
         <p:nvSpPr>
+          <p:cNvPr id="5" name="Shape 3"/>
+          <p:cNvSpPr/>
+          <p:nvPr/>
+        </p:nvSpPr>
+        <p:spPr>
+          <a:xfrm>
+            <a:off x="7941259" y="91440"/>
+            <a:ext cx="3701796" cy="274320"/>
+          </a:xfrm>
+          <a:prstGeom prst="rect">
+            <a:avLst/>
+          </a:prstGeom>
+          <a:solidFill>
+            <a:srgbClr val="FEF3C7"/>
+          </a:solidFill>
+          <a:ln w="12700">
+            <a:solidFill>
+              <a:srgbClr val="B45309"/>
+            </a:solidFill>
+            <a:prstDash val="solid"/>
+          </a:ln>
+        </p:spPr>
+      </p:sp>
+      <p:sp>
+        <p:nvSpPr>
+          <p:cNvPr id="6" name="Shape 4"/>
+          <p:cNvSpPr/>
+          <p:nvPr/>
+        </p:nvSpPr>
+        <p:spPr>
+          <a:xfrm>
+            <a:off x="7941259" y="91440"/>
+            <a:ext cx="27432" cy="274320"/>
+          </a:xfrm>
+          <a:prstGeom prst="rect">
+            <a:avLst/>
+          </a:prstGeom>
+          <a:solidFill>
+            <a:srgbClr val="B45309"/>
+          </a:solidFill>
+          <a:ln w="12700">
+            <a:solidFill>
+              <a:srgbClr val="B45309"/>
+            </a:solidFill>
+            <a:prstDash val="solid"/>
+          </a:ln>
+        </p:spPr>
+      </p:sp>
+      <p:sp>
+        <p:nvSpPr>
+          <p:cNvPr id="7" name="Shape 5"/>
+          <p:cNvSpPr/>
+          <p:nvPr/>
+        </p:nvSpPr>
+        <p:spPr>
+          <a:xfrm>
+            <a:off x="7996123" y="91440"/>
+            <a:ext cx="27432" cy="274320"/>
+          </a:xfrm>
+          <a:prstGeom prst="rect">
+            <a:avLst/>
+          </a:prstGeom>
+          <a:solidFill>
+            <a:srgbClr val="B45309"/>
+          </a:solidFill>
+          <a:ln w="12700">
+            <a:solidFill>
+              <a:srgbClr val="B45309"/>
+            </a:solidFill>
+            <a:prstDash val="solid"/>
+          </a:ln>
+        </p:spPr>
+      </p:sp>
+      <p:pic>
+        <p:nvPicPr>
+          <p:cNvPr id="8" name="Image 0" descr="preencoded.png">    </p:cNvPr>
+          <p:cNvPicPr>
+            <a:picLocks noChangeAspect="1"/>
+          </p:cNvPicPr>
+          <p:nvPr/>
+        </p:nvPicPr>
+        <p:blipFill>
+          <a:blip r:embed="rId1"/>
+          <a:stretch>
+            <a:fillRect/>
+          </a:stretch>
+        </p:blipFill>
+        <p:spPr>
+          <a:xfrm>
+            <a:off x="8069275" y="128016"/>
+            <a:ext cx="201168" cy="201168"/>
+          </a:xfrm>
+          <a:prstGeom prst="rect">
+            <a:avLst/>
+          </a:prstGeom>
+        </p:spPr>
+      </p:pic>
+      <p:sp>
+        <p:nvSpPr>
+          <p:cNvPr id="9" name="Text 6"/>
+          <p:cNvSpPr txBox="1"/>
+          <p:nvPr/>
+        </p:nvSpPr>
+        <p:spPr>
+          <a:xfrm>
+            <a:off x="8325307" y="91440"/>
+            <a:ext cx="3281172" cy="274320"/>
+          </a:xfrm>
+          <a:prstGeom prst="rect">
+            <a:avLst/>
+          </a:prstGeom>
+          <a:noFill/>
+          <a:ln/>
+        </p:spPr>
+        <p:txBody>
+          <a:bodyPr wrap="square" lIns="0" tIns="0" rIns="0" bIns="0" rtlCol="0" anchor="ctr"/>
+          <a:lstStyle/>
+          <a:p>
+            <a:pPr indent="0" marL="0">
+              <a:buNone/>
+            </a:pPr>
+            <a:r>
+              <a:rPr lang="en-US" sz="1100" b="1" dirty="0">
+                <a:solidFill>
+                  <a:srgbClr val="92400E"/>
+                </a:solidFill>
+                <a:latin typeface="Calibri" pitchFamily="34" charset="0"/>
+                <a:ea typeface="Calibri" pitchFamily="34" charset="-122"/>
+                <a:cs typeface="Calibri" pitchFamily="34" charset="-120"/>
+              </a:rPr>
+              <a:t>DA UTILIZZARE OGGI</a:t>
+            </a:r>
+            <a:pPr indent="0" marL="0">
+              <a:buNone/>
+            </a:pPr>
+            <a:r>
+              <a:rPr lang="en-US" sz="1100" dirty="0">
+                <a:solidFill>
+                  <a:srgbClr val="92400E"/>
+                </a:solidFill>
+                <a:latin typeface="Calibri" pitchFamily="34" charset="0"/>
+                <a:ea typeface="Calibri" pitchFamily="34" charset="-122"/>
+                <a:cs typeface="Calibri" pitchFamily="34" charset="-120"/>
+              </a:rPr>
+              <a:t> · il programma completo</a:t>
+            </a:r>
+            <a:endParaRPr lang="en-US" sz="1100" dirty="0"/>
+          </a:p>
+        </p:txBody>
+      </p:sp>
+      <p:sp>
+        <p:nvSpPr>
           <p:cNvPr id="25" name="Slide Number Placeholder 0"/>
           <p:cNvSpPr>
             <a:spLocks noGrp="1"/>
@@ -6985,6 +8177,158 @@
       </p:sp>
       <p:sp>
         <p:nvSpPr>
+          <p:cNvPr id="17" name="Shape 15"/>
+          <p:cNvSpPr/>
+          <p:nvPr/>
+        </p:nvSpPr>
+        <p:spPr>
+          <a:xfrm>
+            <a:off x="7875600" y="91440"/>
+            <a:ext cx="3767455" cy="274320"/>
+          </a:xfrm>
+          <a:prstGeom prst="rect">
+            <a:avLst/>
+          </a:prstGeom>
+          <a:solidFill>
+            <a:srgbClr val="FEF3C7"/>
+          </a:solidFill>
+          <a:ln w="12700">
+            <a:solidFill>
+              <a:srgbClr val="B45309"/>
+            </a:solidFill>
+            <a:prstDash val="solid"/>
+          </a:ln>
+        </p:spPr>
+      </p:sp>
+      <p:sp>
+        <p:nvSpPr>
+          <p:cNvPr id="18" name="Shape 16"/>
+          <p:cNvSpPr/>
+          <p:nvPr/>
+        </p:nvSpPr>
+        <p:spPr>
+          <a:xfrm>
+            <a:off x="7875600" y="91440"/>
+            <a:ext cx="27432" cy="274320"/>
+          </a:xfrm>
+          <a:prstGeom prst="rect">
+            <a:avLst/>
+          </a:prstGeom>
+          <a:solidFill>
+            <a:srgbClr val="B45309"/>
+          </a:solidFill>
+          <a:ln w="12700">
+            <a:solidFill>
+              <a:srgbClr val="B45309"/>
+            </a:solidFill>
+            <a:prstDash val="solid"/>
+          </a:ln>
+        </p:spPr>
+      </p:sp>
+      <p:sp>
+        <p:nvSpPr>
+          <p:cNvPr id="19" name="Shape 17"/>
+          <p:cNvSpPr/>
+          <p:nvPr/>
+        </p:nvSpPr>
+        <p:spPr>
+          <a:xfrm>
+            <a:off x="7930464" y="91440"/>
+            <a:ext cx="27432" cy="274320"/>
+          </a:xfrm>
+          <a:prstGeom prst="rect">
+            <a:avLst/>
+          </a:prstGeom>
+          <a:solidFill>
+            <a:srgbClr val="B45309"/>
+          </a:solidFill>
+          <a:ln w="12700">
+            <a:solidFill>
+              <a:srgbClr val="B45309"/>
+            </a:solidFill>
+            <a:prstDash val="solid"/>
+          </a:ln>
+        </p:spPr>
+      </p:sp>
+      <p:pic>
+        <p:nvPicPr>
+          <p:cNvPr id="20" name="Image 0" descr="preencoded.png">    </p:cNvPr>
+          <p:cNvPicPr>
+            <a:picLocks noChangeAspect="1"/>
+          </p:cNvPicPr>
+          <p:nvPr/>
+        </p:nvPicPr>
+        <p:blipFill>
+          <a:blip r:embed="rId1"/>
+          <a:stretch>
+            <a:fillRect/>
+          </a:stretch>
+        </p:blipFill>
+        <p:spPr>
+          <a:xfrm>
+            <a:off x="8003616" y="128016"/>
+            <a:ext cx="201168" cy="201168"/>
+          </a:xfrm>
+          <a:prstGeom prst="rect">
+            <a:avLst/>
+          </a:prstGeom>
+        </p:spPr>
+      </p:pic>
+      <p:sp>
+        <p:nvSpPr>
+          <p:cNvPr id="21" name="Text 18"/>
+          <p:cNvSpPr txBox="1"/>
+          <p:nvPr/>
+        </p:nvSpPr>
+        <p:spPr>
+          <a:xfrm>
+            <a:off x="8259648" y="91440"/>
+            <a:ext cx="3346831" cy="274320"/>
+          </a:xfrm>
+          <a:prstGeom prst="rect">
+            <a:avLst/>
+          </a:prstGeom>
+          <a:noFill/>
+          <a:ln/>
+        </p:spPr>
+        <p:txBody>
+          <a:bodyPr wrap="square" lIns="0" tIns="0" rIns="0" bIns="0" rtlCol="0" anchor="ctr"/>
+          <a:lstStyle/>
+          <a:p>
+            <a:pPr indent="0" marL="0">
+              <a:buNone/>
+            </a:pPr>
+            <a:r>
+              <a:rPr lang="en-US" sz="1100" b="1" dirty="0">
+                <a:solidFill>
+                  <a:srgbClr val="92400E"/>
+                </a:solidFill>
+                <a:latin typeface="Calibri" pitchFamily="34" charset="0"/>
+                <a:ea typeface="Calibri" pitchFamily="34" charset="-122"/>
+                <a:cs typeface="Calibri" pitchFamily="34" charset="-120"/>
+              </a:rPr>
+              <a:t>DA UTILIZZARE OGGI</a:t>
+            </a:r>
+            <a:pPr indent="0" marL="0">
+              <a:buNone/>
+            </a:pPr>
+            <a:r>
+              <a:rPr lang="en-US" sz="1100" dirty="0">
+                <a:solidFill>
+                  <a:srgbClr val="92400E"/>
+                </a:solidFill>
+                <a:latin typeface="Calibri" pitchFamily="34" charset="0"/>
+                <a:ea typeface="Calibri" pitchFamily="34" charset="-122"/>
+                <a:cs typeface="Calibri" pitchFamily="34" charset="-120"/>
+              </a:rPr>
+              <a:t> · gli strumenti di PRG32</a:t>
+            </a:r>
+            <a:endParaRPr lang="en-US" sz="1100" dirty="0"/>
+          </a:p>
+        </p:txBody>
+      </p:sp>
+      <p:sp>
+        <p:nvSpPr>
           <p:cNvPr id="25" name="Slide Number Placeholder 0"/>
           <p:cNvSpPr>
             <a:spLocks noGrp="1"/>
@@ -7821,6 +9165,158 @@
       </p:sp>
       <p:sp>
         <p:nvSpPr>
+          <p:cNvPr id="17" name="Shape 15"/>
+          <p:cNvSpPr/>
+          <p:nvPr/>
+        </p:nvSpPr>
+        <p:spPr>
+          <a:xfrm>
+            <a:off x="7875600" y="91440"/>
+            <a:ext cx="3767455" cy="274320"/>
+          </a:xfrm>
+          <a:prstGeom prst="rect">
+            <a:avLst/>
+          </a:prstGeom>
+          <a:solidFill>
+            <a:srgbClr val="FEF3C7"/>
+          </a:solidFill>
+          <a:ln w="12700">
+            <a:solidFill>
+              <a:srgbClr val="B45309"/>
+            </a:solidFill>
+            <a:prstDash val="solid"/>
+          </a:ln>
+        </p:spPr>
+      </p:sp>
+      <p:sp>
+        <p:nvSpPr>
+          <p:cNvPr id="18" name="Shape 16"/>
+          <p:cNvSpPr/>
+          <p:nvPr/>
+        </p:nvSpPr>
+        <p:spPr>
+          <a:xfrm>
+            <a:off x="7875600" y="91440"/>
+            <a:ext cx="27432" cy="274320"/>
+          </a:xfrm>
+          <a:prstGeom prst="rect">
+            <a:avLst/>
+          </a:prstGeom>
+          <a:solidFill>
+            <a:srgbClr val="B45309"/>
+          </a:solidFill>
+          <a:ln w="12700">
+            <a:solidFill>
+              <a:srgbClr val="B45309"/>
+            </a:solidFill>
+            <a:prstDash val="solid"/>
+          </a:ln>
+        </p:spPr>
+      </p:sp>
+      <p:sp>
+        <p:nvSpPr>
+          <p:cNvPr id="19" name="Shape 17"/>
+          <p:cNvSpPr/>
+          <p:nvPr/>
+        </p:nvSpPr>
+        <p:spPr>
+          <a:xfrm>
+            <a:off x="7930464" y="91440"/>
+            <a:ext cx="27432" cy="274320"/>
+          </a:xfrm>
+          <a:prstGeom prst="rect">
+            <a:avLst/>
+          </a:prstGeom>
+          <a:solidFill>
+            <a:srgbClr val="B45309"/>
+          </a:solidFill>
+          <a:ln w="12700">
+            <a:solidFill>
+              <a:srgbClr val="B45309"/>
+            </a:solidFill>
+            <a:prstDash val="solid"/>
+          </a:ln>
+        </p:spPr>
+      </p:sp>
+      <p:pic>
+        <p:nvPicPr>
+          <p:cNvPr id="20" name="Image 0" descr="preencoded.png">    </p:cNvPr>
+          <p:cNvPicPr>
+            <a:picLocks noChangeAspect="1"/>
+          </p:cNvPicPr>
+          <p:nvPr/>
+        </p:nvPicPr>
+        <p:blipFill>
+          <a:blip r:embed="rId1"/>
+          <a:stretch>
+            <a:fillRect/>
+          </a:stretch>
+        </p:blipFill>
+        <p:spPr>
+          <a:xfrm>
+            <a:off x="8003616" y="128016"/>
+            <a:ext cx="201168" cy="201168"/>
+          </a:xfrm>
+          <a:prstGeom prst="rect">
+            <a:avLst/>
+          </a:prstGeom>
+        </p:spPr>
+      </p:pic>
+      <p:sp>
+        <p:nvSpPr>
+          <p:cNvPr id="21" name="Text 18"/>
+          <p:cNvSpPr txBox="1"/>
+          <p:nvPr/>
+        </p:nvSpPr>
+        <p:spPr>
+          <a:xfrm>
+            <a:off x="8259648" y="91440"/>
+            <a:ext cx="3346831" cy="274320"/>
+          </a:xfrm>
+          <a:prstGeom prst="rect">
+            <a:avLst/>
+          </a:prstGeom>
+          <a:noFill/>
+          <a:ln/>
+        </p:spPr>
+        <p:txBody>
+          <a:bodyPr wrap="square" lIns="0" tIns="0" rIns="0" bIns="0" rtlCol="0" anchor="ctr"/>
+          <a:lstStyle/>
+          <a:p>
+            <a:pPr indent="0" marL="0">
+              <a:buNone/>
+            </a:pPr>
+            <a:r>
+              <a:rPr lang="en-US" sz="1100" b="1" dirty="0">
+                <a:solidFill>
+                  <a:srgbClr val="92400E"/>
+                </a:solidFill>
+                <a:latin typeface="Calibri" pitchFamily="34" charset="0"/>
+                <a:ea typeface="Calibri" pitchFamily="34" charset="-122"/>
+                <a:cs typeface="Calibri" pitchFamily="34" charset="-120"/>
+              </a:rPr>
+              <a:t>DA UTILIZZARE OGGI</a:t>
+            </a:r>
+            <a:pPr indent="0" marL="0">
+              <a:buNone/>
+            </a:pPr>
+            <a:r>
+              <a:rPr lang="en-US" sz="1100" dirty="0">
+                <a:solidFill>
+                  <a:srgbClr val="92400E"/>
+                </a:solidFill>
+                <a:latin typeface="Calibri" pitchFamily="34" charset="0"/>
+                <a:ea typeface="Calibri" pitchFamily="34" charset="-122"/>
+                <a:cs typeface="Calibri" pitchFamily="34" charset="-120"/>
+              </a:rPr>
+              <a:t> · gli strumenti di PRG32</a:t>
+            </a:r>
+            <a:endParaRPr lang="en-US" sz="1100" dirty="0"/>
+          </a:p>
+        </p:txBody>
+      </p:sp>
+      <p:sp>
+        <p:nvSpPr>
           <p:cNvPr id="25" name="Slide Number Placeholder 0"/>
           <p:cNvSpPr>
             <a:spLocks noGrp="1"/>
@@ -8650,6 +10146,158 @@
                 <a:cs typeface="Calibri" pitchFamily="34" charset="-120"/>
               </a:rPr>
               <a:t>Schermo nero: confrontate il cablaggio del display con il firmware</a:t>
+            </a:r>
+            <a:endParaRPr lang="en-US" sz="1100" dirty="0"/>
+          </a:p>
+        </p:txBody>
+      </p:sp>
+      <p:sp>
+        <p:nvSpPr>
+          <p:cNvPr id="17" name="Shape 15"/>
+          <p:cNvSpPr/>
+          <p:nvPr/>
+        </p:nvSpPr>
+        <p:spPr>
+          <a:xfrm>
+            <a:off x="7875600" y="91440"/>
+            <a:ext cx="3767455" cy="274320"/>
+          </a:xfrm>
+          <a:prstGeom prst="rect">
+            <a:avLst/>
+          </a:prstGeom>
+          <a:solidFill>
+            <a:srgbClr val="FEF3C7"/>
+          </a:solidFill>
+          <a:ln w="12700">
+            <a:solidFill>
+              <a:srgbClr val="B45309"/>
+            </a:solidFill>
+            <a:prstDash val="solid"/>
+          </a:ln>
+        </p:spPr>
+      </p:sp>
+      <p:sp>
+        <p:nvSpPr>
+          <p:cNvPr id="18" name="Shape 16"/>
+          <p:cNvSpPr/>
+          <p:nvPr/>
+        </p:nvSpPr>
+        <p:spPr>
+          <a:xfrm>
+            <a:off x="7875600" y="91440"/>
+            <a:ext cx="27432" cy="274320"/>
+          </a:xfrm>
+          <a:prstGeom prst="rect">
+            <a:avLst/>
+          </a:prstGeom>
+          <a:solidFill>
+            <a:srgbClr val="B45309"/>
+          </a:solidFill>
+          <a:ln w="12700">
+            <a:solidFill>
+              <a:srgbClr val="B45309"/>
+            </a:solidFill>
+            <a:prstDash val="solid"/>
+          </a:ln>
+        </p:spPr>
+      </p:sp>
+      <p:sp>
+        <p:nvSpPr>
+          <p:cNvPr id="19" name="Shape 17"/>
+          <p:cNvSpPr/>
+          <p:nvPr/>
+        </p:nvSpPr>
+        <p:spPr>
+          <a:xfrm>
+            <a:off x="7930464" y="91440"/>
+            <a:ext cx="27432" cy="274320"/>
+          </a:xfrm>
+          <a:prstGeom prst="rect">
+            <a:avLst/>
+          </a:prstGeom>
+          <a:solidFill>
+            <a:srgbClr val="B45309"/>
+          </a:solidFill>
+          <a:ln w="12700">
+            <a:solidFill>
+              <a:srgbClr val="B45309"/>
+            </a:solidFill>
+            <a:prstDash val="solid"/>
+          </a:ln>
+        </p:spPr>
+      </p:sp>
+      <p:pic>
+        <p:nvPicPr>
+          <p:cNvPr id="20" name="Image 0" descr="preencoded.png">    </p:cNvPr>
+          <p:cNvPicPr>
+            <a:picLocks noChangeAspect="1"/>
+          </p:cNvPicPr>
+          <p:nvPr/>
+        </p:nvPicPr>
+        <p:blipFill>
+          <a:blip r:embed="rId1"/>
+          <a:stretch>
+            <a:fillRect/>
+          </a:stretch>
+        </p:blipFill>
+        <p:spPr>
+          <a:xfrm>
+            <a:off x="8003616" y="128016"/>
+            <a:ext cx="201168" cy="201168"/>
+          </a:xfrm>
+          <a:prstGeom prst="rect">
+            <a:avLst/>
+          </a:prstGeom>
+        </p:spPr>
+      </p:pic>
+      <p:sp>
+        <p:nvSpPr>
+          <p:cNvPr id="21" name="Text 18"/>
+          <p:cNvSpPr txBox="1"/>
+          <p:nvPr/>
+        </p:nvSpPr>
+        <p:spPr>
+          <a:xfrm>
+            <a:off x="8259648" y="91440"/>
+            <a:ext cx="3346831" cy="274320"/>
+          </a:xfrm>
+          <a:prstGeom prst="rect">
+            <a:avLst/>
+          </a:prstGeom>
+          <a:noFill/>
+          <a:ln/>
+        </p:spPr>
+        <p:txBody>
+          <a:bodyPr wrap="square" lIns="0" tIns="0" rIns="0" bIns="0" rtlCol="0" anchor="ctr"/>
+          <a:lstStyle/>
+          <a:p>
+            <a:pPr indent="0" marL="0">
+              <a:buNone/>
+            </a:pPr>
+            <a:r>
+              <a:rPr lang="en-US" sz="1100" b="1" dirty="0">
+                <a:solidFill>
+                  <a:srgbClr val="92400E"/>
+                </a:solidFill>
+                <a:latin typeface="Calibri" pitchFamily="34" charset="0"/>
+                <a:ea typeface="Calibri" pitchFamily="34" charset="-122"/>
+                <a:cs typeface="Calibri" pitchFamily="34" charset="-120"/>
+              </a:rPr>
+              <a:t>DA UTILIZZARE OGGI</a:t>
+            </a:r>
+            <a:pPr indent="0" marL="0">
+              <a:buNone/>
+            </a:pPr>
+            <a:r>
+              <a:rPr lang="en-US" sz="1100" dirty="0">
+                <a:solidFill>
+                  <a:srgbClr val="92400E"/>
+                </a:solidFill>
+                <a:latin typeface="Calibri" pitchFamily="34" charset="0"/>
+                <a:ea typeface="Calibri" pitchFamily="34" charset="-122"/>
+                <a:cs typeface="Calibri" pitchFamily="34" charset="-120"/>
+              </a:rPr>
+              <a:t> · gli strumenti di PRG32</a:t>
             </a:r>
             <a:endParaRPr lang="en-US" sz="1100" dirty="0"/>
           </a:p>
@@ -10038,6 +11686,158 @@
       </p:graphicFrame>
       <p:sp>
         <p:nvSpPr>
+          <p:cNvPr id="4" name="Shape 1"/>
+          <p:cNvSpPr/>
+          <p:nvPr/>
+        </p:nvSpPr>
+        <p:spPr>
+          <a:xfrm>
+            <a:off x="7875600" y="91440"/>
+            <a:ext cx="3767455" cy="274320"/>
+          </a:xfrm>
+          <a:prstGeom prst="rect">
+            <a:avLst/>
+          </a:prstGeom>
+          <a:solidFill>
+            <a:srgbClr val="FEF3C7"/>
+          </a:solidFill>
+          <a:ln w="12700">
+            <a:solidFill>
+              <a:srgbClr val="B45309"/>
+            </a:solidFill>
+            <a:prstDash val="solid"/>
+          </a:ln>
+        </p:spPr>
+      </p:sp>
+      <p:sp>
+        <p:nvSpPr>
+          <p:cNvPr id="5" name="Shape 2"/>
+          <p:cNvSpPr/>
+          <p:nvPr/>
+        </p:nvSpPr>
+        <p:spPr>
+          <a:xfrm>
+            <a:off x="7875600" y="91440"/>
+            <a:ext cx="27432" cy="274320"/>
+          </a:xfrm>
+          <a:prstGeom prst="rect">
+            <a:avLst/>
+          </a:prstGeom>
+          <a:solidFill>
+            <a:srgbClr val="B45309"/>
+          </a:solidFill>
+          <a:ln w="12700">
+            <a:solidFill>
+              <a:srgbClr val="B45309"/>
+            </a:solidFill>
+            <a:prstDash val="solid"/>
+          </a:ln>
+        </p:spPr>
+      </p:sp>
+      <p:sp>
+        <p:nvSpPr>
+          <p:cNvPr id="6" name="Shape 3"/>
+          <p:cNvSpPr/>
+          <p:nvPr/>
+        </p:nvSpPr>
+        <p:spPr>
+          <a:xfrm>
+            <a:off x="7930464" y="91440"/>
+            <a:ext cx="27432" cy="274320"/>
+          </a:xfrm>
+          <a:prstGeom prst="rect">
+            <a:avLst/>
+          </a:prstGeom>
+          <a:solidFill>
+            <a:srgbClr val="B45309"/>
+          </a:solidFill>
+          <a:ln w="12700">
+            <a:solidFill>
+              <a:srgbClr val="B45309"/>
+            </a:solidFill>
+            <a:prstDash val="solid"/>
+          </a:ln>
+        </p:spPr>
+      </p:sp>
+      <p:pic>
+        <p:nvPicPr>
+          <p:cNvPr id="7" name="Image 0" descr="preencoded.png">    </p:cNvPr>
+          <p:cNvPicPr>
+            <a:picLocks noChangeAspect="1"/>
+          </p:cNvPicPr>
+          <p:nvPr/>
+        </p:nvPicPr>
+        <p:blipFill>
+          <a:blip r:embed="rId1"/>
+          <a:stretch>
+            <a:fillRect/>
+          </a:stretch>
+        </p:blipFill>
+        <p:spPr>
+          <a:xfrm>
+            <a:off x="8003616" y="128016"/>
+            <a:ext cx="201168" cy="201168"/>
+          </a:xfrm>
+          <a:prstGeom prst="rect">
+            <a:avLst/>
+          </a:prstGeom>
+        </p:spPr>
+      </p:pic>
+      <p:sp>
+        <p:nvSpPr>
+          <p:cNvPr id="8" name="Text 4"/>
+          <p:cNvSpPr txBox="1"/>
+          <p:nvPr/>
+        </p:nvSpPr>
+        <p:spPr>
+          <a:xfrm>
+            <a:off x="8259648" y="91440"/>
+            <a:ext cx="3346831" cy="274320"/>
+          </a:xfrm>
+          <a:prstGeom prst="rect">
+            <a:avLst/>
+          </a:prstGeom>
+          <a:noFill/>
+          <a:ln/>
+        </p:spPr>
+        <p:txBody>
+          <a:bodyPr wrap="square" lIns="0" tIns="0" rIns="0" bIns="0" rtlCol="0" anchor="ctr"/>
+          <a:lstStyle/>
+          <a:p>
+            <a:pPr indent="0" marL="0">
+              <a:buNone/>
+            </a:pPr>
+            <a:r>
+              <a:rPr lang="en-US" sz="1100" b="1" dirty="0">
+                <a:solidFill>
+                  <a:srgbClr val="92400E"/>
+                </a:solidFill>
+                <a:latin typeface="Calibri" pitchFamily="34" charset="0"/>
+                <a:ea typeface="Calibri" pitchFamily="34" charset="-122"/>
+                <a:cs typeface="Calibri" pitchFamily="34" charset="-120"/>
+              </a:rPr>
+              <a:t>DA UTILIZZARE OGGI</a:t>
+            </a:r>
+            <a:pPr indent="0" marL="0">
+              <a:buNone/>
+            </a:pPr>
+            <a:r>
+              <a:rPr lang="en-US" sz="1100" dirty="0">
+                <a:solidFill>
+                  <a:srgbClr val="92400E"/>
+                </a:solidFill>
+                <a:latin typeface="Calibri" pitchFamily="34" charset="0"/>
+                <a:ea typeface="Calibri" pitchFamily="34" charset="-122"/>
+                <a:cs typeface="Calibri" pitchFamily="34" charset="-120"/>
+              </a:rPr>
+              <a:t> · gli strumenti di PRG32</a:t>
+            </a:r>
+            <a:endParaRPr lang="en-US" sz="1100" dirty="0"/>
+          </a:p>
+        </p:txBody>
+      </p:sp>
+      <p:sp>
+        <p:nvSpPr>
           <p:cNvPr id="25" name="Slide Number Placeholder 0"/>
           <p:cNvSpPr>
             <a:spLocks noGrp="1"/>
@@ -12208,6 +14008,133 @@
       </p:sp>
       <p:sp>
         <p:nvSpPr>
+          <p:cNvPr id="17" name="Shape 15"/>
+          <p:cNvSpPr/>
+          <p:nvPr/>
+        </p:nvSpPr>
+        <p:spPr>
+          <a:xfrm>
+            <a:off x="8051622" y="91440"/>
+            <a:ext cx="3591433" cy="274320"/>
+          </a:xfrm>
+          <a:prstGeom prst="rect">
+            <a:avLst/>
+          </a:prstGeom>
+          <a:solidFill>
+            <a:srgbClr val="E0F2FE"/>
+          </a:solidFill>
+          <a:ln w="12700">
+            <a:solidFill>
+              <a:srgbClr val="0369A1"/>
+            </a:solidFill>
+            <a:prstDash val="solid"/>
+          </a:ln>
+        </p:spPr>
+      </p:sp>
+      <p:sp>
+        <p:nvSpPr>
+          <p:cNvPr id="18" name="Shape 16"/>
+          <p:cNvSpPr/>
+          <p:nvPr/>
+        </p:nvSpPr>
+        <p:spPr>
+          <a:xfrm>
+            <a:off x="8051622" y="91440"/>
+            <a:ext cx="73152" cy="274320"/>
+          </a:xfrm>
+          <a:prstGeom prst="rect">
+            <a:avLst/>
+          </a:prstGeom>
+          <a:solidFill>
+            <a:srgbClr val="0369A1"/>
+          </a:solidFill>
+          <a:ln w="12700">
+            <a:solidFill>
+              <a:srgbClr val="0369A1"/>
+            </a:solidFill>
+            <a:prstDash val="solid"/>
+          </a:ln>
+        </p:spPr>
+      </p:sp>
+      <p:pic>
+        <p:nvPicPr>
+          <p:cNvPr id="19" name="Image 0" descr="preencoded.png">    </p:cNvPr>
+          <p:cNvPicPr>
+            <a:picLocks noChangeAspect="1"/>
+          </p:cNvPicPr>
+          <p:nvPr/>
+        </p:nvPicPr>
+        <p:blipFill>
+          <a:blip r:embed="rId1"/>
+          <a:stretch>
+            <a:fillRect/>
+          </a:stretch>
+        </p:blipFill>
+        <p:spPr>
+          <a:xfrm>
+            <a:off x="8179638" y="128016"/>
+            <a:ext cx="201168" cy="201168"/>
+          </a:xfrm>
+          <a:prstGeom prst="rect">
+            <a:avLst/>
+          </a:prstGeom>
+        </p:spPr>
+      </p:pic>
+      <p:sp>
+        <p:nvSpPr>
+          <p:cNvPr id="20" name="Text 17"/>
+          <p:cNvSpPr txBox="1"/>
+          <p:nvPr/>
+        </p:nvSpPr>
+        <p:spPr>
+          <a:xfrm>
+            <a:off x="8435670" y="91440"/>
+            <a:ext cx="3170809" cy="274320"/>
+          </a:xfrm>
+          <a:prstGeom prst="rect">
+            <a:avLst/>
+          </a:prstGeom>
+          <a:noFill/>
+          <a:ln/>
+        </p:spPr>
+        <p:txBody>
+          <a:bodyPr wrap="square" lIns="0" tIns="0" rIns="0" bIns="0" rtlCol="0" anchor="ctr"/>
+          <a:lstStyle/>
+          <a:p>
+            <a:pPr indent="0" marL="0">
+              <a:buNone/>
+            </a:pPr>
+            <a:r>
+              <a:rPr lang="en-US" sz="1100" b="1" dirty="0">
+                <a:solidFill>
+                  <a:srgbClr val="075985"/>
+                </a:solidFill>
+                <a:latin typeface="Calibri" pitchFamily="34" charset="0"/>
+                <a:ea typeface="Calibri" pitchFamily="34" charset="-122"/>
+                <a:cs typeface="Calibri" pitchFamily="34" charset="-120"/>
+              </a:rPr>
+              <a:t>DA COMPRENDERE OGGI</a:t>
+            </a:r>
+            <a:pPr indent="0" marL="0">
+              <a:buNone/>
+            </a:pPr>
+            <a:r>
+              <a:rPr lang="en-US" sz="1100" dirty="0">
+                <a:solidFill>
+                  <a:srgbClr val="075985"/>
+                </a:solidFill>
+                <a:latin typeface="Calibri" pitchFamily="34" charset="0"/>
+                <a:ea typeface="Calibri" pitchFamily="34" charset="-122"/>
+                <a:cs typeface="Calibri" pitchFamily="34" charset="-120"/>
+              </a:rPr>
+              <a:t> · le maschere di bit</a:t>
+            </a:r>
+            <a:endParaRPr lang="en-US" sz="1100" dirty="0"/>
+          </a:p>
+        </p:txBody>
+      </p:sp>
+      <p:sp>
+        <p:nvSpPr>
           <p:cNvPr id="25" name="Slide Number Placeholder 0"/>
           <p:cNvSpPr>
             <a:spLocks noGrp="1"/>
@@ -12715,6 +14642,133 @@
               <a:t>Laboratorio 06, passo 1: sette lampade, una per ogni bit dei pulsanti</a:t>
             </a:r>
             <a:endParaRPr lang="en-US" sz="1200" dirty="0"/>
+          </a:p>
+        </p:txBody>
+      </p:sp>
+      <p:sp>
+        <p:nvSpPr>
+          <p:cNvPr id="15" name="Shape 12"/>
+          <p:cNvSpPr/>
+          <p:nvPr/>
+        </p:nvSpPr>
+        <p:spPr>
+          <a:xfrm>
+            <a:off x="8051622" y="91440"/>
+            <a:ext cx="3591433" cy="274320"/>
+          </a:xfrm>
+          <a:prstGeom prst="rect">
+            <a:avLst/>
+          </a:prstGeom>
+          <a:solidFill>
+            <a:srgbClr val="E0F2FE"/>
+          </a:solidFill>
+          <a:ln w="12700">
+            <a:solidFill>
+              <a:srgbClr val="0369A1"/>
+            </a:solidFill>
+            <a:prstDash val="solid"/>
+          </a:ln>
+        </p:spPr>
+      </p:sp>
+      <p:sp>
+        <p:nvSpPr>
+          <p:cNvPr id="16" name="Shape 13"/>
+          <p:cNvSpPr/>
+          <p:nvPr/>
+        </p:nvSpPr>
+        <p:spPr>
+          <a:xfrm>
+            <a:off x="8051622" y="91440"/>
+            <a:ext cx="73152" cy="274320"/>
+          </a:xfrm>
+          <a:prstGeom prst="rect">
+            <a:avLst/>
+          </a:prstGeom>
+          <a:solidFill>
+            <a:srgbClr val="0369A1"/>
+          </a:solidFill>
+          <a:ln w="12700">
+            <a:solidFill>
+              <a:srgbClr val="0369A1"/>
+            </a:solidFill>
+            <a:prstDash val="solid"/>
+          </a:ln>
+        </p:spPr>
+      </p:sp>
+      <p:pic>
+        <p:nvPicPr>
+          <p:cNvPr id="17" name="Image 1" descr="preencoded.png">    </p:cNvPr>
+          <p:cNvPicPr>
+            <a:picLocks noChangeAspect="1"/>
+          </p:cNvPicPr>
+          <p:nvPr/>
+        </p:nvPicPr>
+        <p:blipFill>
+          <a:blip r:embed="rId2"/>
+          <a:stretch>
+            <a:fillRect/>
+          </a:stretch>
+        </p:blipFill>
+        <p:spPr>
+          <a:xfrm>
+            <a:off x="8179638" y="128016"/>
+            <a:ext cx="201168" cy="201168"/>
+          </a:xfrm>
+          <a:prstGeom prst="rect">
+            <a:avLst/>
+          </a:prstGeom>
+        </p:spPr>
+      </p:pic>
+      <p:sp>
+        <p:nvSpPr>
+          <p:cNvPr id="18" name="Text 14"/>
+          <p:cNvSpPr txBox="1"/>
+          <p:nvPr/>
+        </p:nvSpPr>
+        <p:spPr>
+          <a:xfrm>
+            <a:off x="8435670" y="91440"/>
+            <a:ext cx="3170809" cy="274320"/>
+          </a:xfrm>
+          <a:prstGeom prst="rect">
+            <a:avLst/>
+          </a:prstGeom>
+          <a:noFill/>
+          <a:ln/>
+        </p:spPr>
+        <p:txBody>
+          <a:bodyPr wrap="square" lIns="0" tIns="0" rIns="0" bIns="0" rtlCol="0" anchor="ctr"/>
+          <a:lstStyle/>
+          <a:p>
+            <a:pPr indent="0" marL="0">
+              <a:buNone/>
+            </a:pPr>
+            <a:r>
+              <a:rPr lang="en-US" sz="1100" b="1" dirty="0">
+                <a:solidFill>
+                  <a:srgbClr val="075985"/>
+                </a:solidFill>
+                <a:latin typeface="Calibri" pitchFamily="34" charset="0"/>
+                <a:ea typeface="Calibri" pitchFamily="34" charset="-122"/>
+                <a:cs typeface="Calibri" pitchFamily="34" charset="-120"/>
+              </a:rPr>
+              <a:t>DA COMPRENDERE OGGI</a:t>
+            </a:r>
+            <a:pPr indent="0" marL="0">
+              <a:buNone/>
+            </a:pPr>
+            <a:r>
+              <a:rPr lang="en-US" sz="1100" dirty="0">
+                <a:solidFill>
+                  <a:srgbClr val="075985"/>
+                </a:solidFill>
+                <a:latin typeface="Calibri" pitchFamily="34" charset="0"/>
+                <a:ea typeface="Calibri" pitchFamily="34" charset="-122"/>
+                <a:cs typeface="Calibri" pitchFamily="34" charset="-120"/>
+              </a:rPr>
+              <a:t> · le maschere di bit</a:t>
+            </a:r>
+            <a:endParaRPr lang="en-US" sz="1100" dirty="0"/>
           </a:p>
         </p:txBody>
       </p:sp>
@@ -14275,6 +16329,133 @@
       </p:sp>
       <p:sp>
         <p:nvSpPr>
+          <p:cNvPr id="5" name="Shape 2"/>
+          <p:cNvSpPr/>
+          <p:nvPr/>
+        </p:nvSpPr>
+        <p:spPr>
+          <a:xfrm>
+            <a:off x="8051622" y="91440"/>
+            <a:ext cx="3591433" cy="274320"/>
+          </a:xfrm>
+          <a:prstGeom prst="rect">
+            <a:avLst/>
+          </a:prstGeom>
+          <a:solidFill>
+            <a:srgbClr val="E0F2FE"/>
+          </a:solidFill>
+          <a:ln w="12700">
+            <a:solidFill>
+              <a:srgbClr val="0369A1"/>
+            </a:solidFill>
+            <a:prstDash val="solid"/>
+          </a:ln>
+        </p:spPr>
+      </p:sp>
+      <p:sp>
+        <p:nvSpPr>
+          <p:cNvPr id="6" name="Shape 3"/>
+          <p:cNvSpPr/>
+          <p:nvPr/>
+        </p:nvSpPr>
+        <p:spPr>
+          <a:xfrm>
+            <a:off x="8051622" y="91440"/>
+            <a:ext cx="73152" cy="274320"/>
+          </a:xfrm>
+          <a:prstGeom prst="rect">
+            <a:avLst/>
+          </a:prstGeom>
+          <a:solidFill>
+            <a:srgbClr val="0369A1"/>
+          </a:solidFill>
+          <a:ln w="12700">
+            <a:solidFill>
+              <a:srgbClr val="0369A1"/>
+            </a:solidFill>
+            <a:prstDash val="solid"/>
+          </a:ln>
+        </p:spPr>
+      </p:sp>
+      <p:pic>
+        <p:nvPicPr>
+          <p:cNvPr id="7" name="Image 0" descr="preencoded.png">    </p:cNvPr>
+          <p:cNvPicPr>
+            <a:picLocks noChangeAspect="1"/>
+          </p:cNvPicPr>
+          <p:nvPr/>
+        </p:nvPicPr>
+        <p:blipFill>
+          <a:blip r:embed="rId1"/>
+          <a:stretch>
+            <a:fillRect/>
+          </a:stretch>
+        </p:blipFill>
+        <p:spPr>
+          <a:xfrm>
+            <a:off x="8179638" y="128016"/>
+            <a:ext cx="201168" cy="201168"/>
+          </a:xfrm>
+          <a:prstGeom prst="rect">
+            <a:avLst/>
+          </a:prstGeom>
+        </p:spPr>
+      </p:pic>
+      <p:sp>
+        <p:nvSpPr>
+          <p:cNvPr id="8" name="Text 4"/>
+          <p:cNvSpPr txBox="1"/>
+          <p:nvPr/>
+        </p:nvSpPr>
+        <p:spPr>
+          <a:xfrm>
+            <a:off x="8435670" y="91440"/>
+            <a:ext cx="3170809" cy="274320"/>
+          </a:xfrm>
+          <a:prstGeom prst="rect">
+            <a:avLst/>
+          </a:prstGeom>
+          <a:noFill/>
+          <a:ln/>
+        </p:spPr>
+        <p:txBody>
+          <a:bodyPr wrap="square" lIns="0" tIns="0" rIns="0" bIns="0" rtlCol="0" anchor="ctr"/>
+          <a:lstStyle/>
+          <a:p>
+            <a:pPr indent="0" marL="0">
+              <a:buNone/>
+            </a:pPr>
+            <a:r>
+              <a:rPr lang="en-US" sz="1100" b="1" dirty="0">
+                <a:solidFill>
+                  <a:srgbClr val="075985"/>
+                </a:solidFill>
+                <a:latin typeface="Calibri" pitchFamily="34" charset="0"/>
+                <a:ea typeface="Calibri" pitchFamily="34" charset="-122"/>
+                <a:cs typeface="Calibri" pitchFamily="34" charset="-120"/>
+              </a:rPr>
+              <a:t>DA COMPRENDERE OGGI</a:t>
+            </a:r>
+            <a:pPr indent="0" marL="0">
+              <a:buNone/>
+            </a:pPr>
+            <a:r>
+              <a:rPr lang="en-US" sz="1100" dirty="0">
+                <a:solidFill>
+                  <a:srgbClr val="075985"/>
+                </a:solidFill>
+                <a:latin typeface="Calibri" pitchFamily="34" charset="0"/>
+                <a:ea typeface="Calibri" pitchFamily="34" charset="-122"/>
+                <a:cs typeface="Calibri" pitchFamily="34" charset="-120"/>
+              </a:rPr>
+              <a:t> · le maschere di bit</a:t>
+            </a:r>
+            <a:endParaRPr lang="en-US" sz="1100" dirty="0"/>
+          </a:p>
+        </p:txBody>
+      </p:sp>
+      <p:sp>
+        <p:nvSpPr>
           <p:cNvPr id="25" name="Slide Number Placeholder 0"/>
           <p:cNvSpPr>
             <a:spLocks noGrp="1"/>
@@ -15791,6 +17972,133 @@
       </p:graphicFrame>
       <p:sp>
         <p:nvSpPr>
+          <p:cNvPr id="4" name="Shape 1"/>
+          <p:cNvSpPr/>
+          <p:nvPr/>
+        </p:nvSpPr>
+        <p:spPr>
+          <a:xfrm>
+            <a:off x="8051622" y="91440"/>
+            <a:ext cx="3591433" cy="274320"/>
+          </a:xfrm>
+          <a:prstGeom prst="rect">
+            <a:avLst/>
+          </a:prstGeom>
+          <a:solidFill>
+            <a:srgbClr val="E0F2FE"/>
+          </a:solidFill>
+          <a:ln w="12700">
+            <a:solidFill>
+              <a:srgbClr val="0369A1"/>
+            </a:solidFill>
+            <a:prstDash val="solid"/>
+          </a:ln>
+        </p:spPr>
+      </p:sp>
+      <p:sp>
+        <p:nvSpPr>
+          <p:cNvPr id="5" name="Shape 2"/>
+          <p:cNvSpPr/>
+          <p:nvPr/>
+        </p:nvSpPr>
+        <p:spPr>
+          <a:xfrm>
+            <a:off x="8051622" y="91440"/>
+            <a:ext cx="73152" cy="274320"/>
+          </a:xfrm>
+          <a:prstGeom prst="rect">
+            <a:avLst/>
+          </a:prstGeom>
+          <a:solidFill>
+            <a:srgbClr val="0369A1"/>
+          </a:solidFill>
+          <a:ln w="12700">
+            <a:solidFill>
+              <a:srgbClr val="0369A1"/>
+            </a:solidFill>
+            <a:prstDash val="solid"/>
+          </a:ln>
+        </p:spPr>
+      </p:sp>
+      <p:pic>
+        <p:nvPicPr>
+          <p:cNvPr id="6" name="Image 0" descr="preencoded.png">    </p:cNvPr>
+          <p:cNvPicPr>
+            <a:picLocks noChangeAspect="1"/>
+          </p:cNvPicPr>
+          <p:nvPr/>
+        </p:nvPicPr>
+        <p:blipFill>
+          <a:blip r:embed="rId1"/>
+          <a:stretch>
+            <a:fillRect/>
+          </a:stretch>
+        </p:blipFill>
+        <p:spPr>
+          <a:xfrm>
+            <a:off x="8179638" y="128016"/>
+            <a:ext cx="201168" cy="201168"/>
+          </a:xfrm>
+          <a:prstGeom prst="rect">
+            <a:avLst/>
+          </a:prstGeom>
+        </p:spPr>
+      </p:pic>
+      <p:sp>
+        <p:nvSpPr>
+          <p:cNvPr id="7" name="Text 3"/>
+          <p:cNvSpPr txBox="1"/>
+          <p:nvPr/>
+        </p:nvSpPr>
+        <p:spPr>
+          <a:xfrm>
+            <a:off x="8435670" y="91440"/>
+            <a:ext cx="3170809" cy="274320"/>
+          </a:xfrm>
+          <a:prstGeom prst="rect">
+            <a:avLst/>
+          </a:prstGeom>
+          <a:noFill/>
+          <a:ln/>
+        </p:spPr>
+        <p:txBody>
+          <a:bodyPr wrap="square" lIns="0" tIns="0" rIns="0" bIns="0" rtlCol="0" anchor="ctr"/>
+          <a:lstStyle/>
+          <a:p>
+            <a:pPr indent="0" marL="0">
+              <a:buNone/>
+            </a:pPr>
+            <a:r>
+              <a:rPr lang="en-US" sz="1100" b="1" dirty="0">
+                <a:solidFill>
+                  <a:srgbClr val="075985"/>
+                </a:solidFill>
+                <a:latin typeface="Calibri" pitchFamily="34" charset="0"/>
+                <a:ea typeface="Calibri" pitchFamily="34" charset="-122"/>
+                <a:cs typeface="Calibri" pitchFamily="34" charset="-120"/>
+              </a:rPr>
+              <a:t>DA COMPRENDERE OGGI</a:t>
+            </a:r>
+            <a:pPr indent="0" marL="0">
+              <a:buNone/>
+            </a:pPr>
+            <a:r>
+              <a:rPr lang="en-US" sz="1100" dirty="0">
+                <a:solidFill>
+                  <a:srgbClr val="075985"/>
+                </a:solidFill>
+                <a:latin typeface="Calibri" pitchFamily="34" charset="0"/>
+                <a:ea typeface="Calibri" pitchFamily="34" charset="-122"/>
+                <a:cs typeface="Calibri" pitchFamily="34" charset="-120"/>
+              </a:rPr>
+              <a:t> · le maschere di bit</a:t>
+            </a:r>
+            <a:endParaRPr lang="en-US" sz="1100" dirty="0"/>
+          </a:p>
+        </p:txBody>
+      </p:sp>
+      <p:sp>
+        <p:nvSpPr>
           <p:cNvPr id="25" name="Slide Number Placeholder 0"/>
           <p:cNvSpPr>
             <a:spLocks noGrp="1"/>
@@ -16646,6 +18954,133 @@
       </p:sp>
       <p:sp>
         <p:nvSpPr>
+          <p:cNvPr id="17" name="Shape 15"/>
+          <p:cNvSpPr/>
+          <p:nvPr/>
+        </p:nvSpPr>
+        <p:spPr>
+          <a:xfrm>
+            <a:off x="8051622" y="91440"/>
+            <a:ext cx="3591433" cy="274320"/>
+          </a:xfrm>
+          <a:prstGeom prst="rect">
+            <a:avLst/>
+          </a:prstGeom>
+          <a:solidFill>
+            <a:srgbClr val="E0F2FE"/>
+          </a:solidFill>
+          <a:ln w="12700">
+            <a:solidFill>
+              <a:srgbClr val="0369A1"/>
+            </a:solidFill>
+            <a:prstDash val="solid"/>
+          </a:ln>
+        </p:spPr>
+      </p:sp>
+      <p:sp>
+        <p:nvSpPr>
+          <p:cNvPr id="18" name="Shape 16"/>
+          <p:cNvSpPr/>
+          <p:nvPr/>
+        </p:nvSpPr>
+        <p:spPr>
+          <a:xfrm>
+            <a:off x="8051622" y="91440"/>
+            <a:ext cx="73152" cy="274320"/>
+          </a:xfrm>
+          <a:prstGeom prst="rect">
+            <a:avLst/>
+          </a:prstGeom>
+          <a:solidFill>
+            <a:srgbClr val="0369A1"/>
+          </a:solidFill>
+          <a:ln w="12700">
+            <a:solidFill>
+              <a:srgbClr val="0369A1"/>
+            </a:solidFill>
+            <a:prstDash val="solid"/>
+          </a:ln>
+        </p:spPr>
+      </p:sp>
+      <p:pic>
+        <p:nvPicPr>
+          <p:cNvPr id="19" name="Image 0" descr="preencoded.png">    </p:cNvPr>
+          <p:cNvPicPr>
+            <a:picLocks noChangeAspect="1"/>
+          </p:cNvPicPr>
+          <p:nvPr/>
+        </p:nvPicPr>
+        <p:blipFill>
+          <a:blip r:embed="rId1"/>
+          <a:stretch>
+            <a:fillRect/>
+          </a:stretch>
+        </p:blipFill>
+        <p:spPr>
+          <a:xfrm>
+            <a:off x="8179638" y="128016"/>
+            <a:ext cx="201168" cy="201168"/>
+          </a:xfrm>
+          <a:prstGeom prst="rect">
+            <a:avLst/>
+          </a:prstGeom>
+        </p:spPr>
+      </p:pic>
+      <p:sp>
+        <p:nvSpPr>
+          <p:cNvPr id="20" name="Text 17"/>
+          <p:cNvSpPr txBox="1"/>
+          <p:nvPr/>
+        </p:nvSpPr>
+        <p:spPr>
+          <a:xfrm>
+            <a:off x="8435670" y="91440"/>
+            <a:ext cx="3170809" cy="274320"/>
+          </a:xfrm>
+          <a:prstGeom prst="rect">
+            <a:avLst/>
+          </a:prstGeom>
+          <a:noFill/>
+          <a:ln/>
+        </p:spPr>
+        <p:txBody>
+          <a:bodyPr wrap="square" lIns="0" tIns="0" rIns="0" bIns="0" rtlCol="0" anchor="ctr"/>
+          <a:lstStyle/>
+          <a:p>
+            <a:pPr indent="0" marL="0">
+              <a:buNone/>
+            </a:pPr>
+            <a:r>
+              <a:rPr lang="en-US" sz="1100" b="1" dirty="0">
+                <a:solidFill>
+                  <a:srgbClr val="075985"/>
+                </a:solidFill>
+                <a:latin typeface="Calibri" pitchFamily="34" charset="0"/>
+                <a:ea typeface="Calibri" pitchFamily="34" charset="-122"/>
+                <a:cs typeface="Calibri" pitchFamily="34" charset="-120"/>
+              </a:rPr>
+              <a:t>DA COMPRENDERE OGGI</a:t>
+            </a:r>
+            <a:pPr indent="0" marL="0">
+              <a:buNone/>
+            </a:pPr>
+            <a:r>
+              <a:rPr lang="en-US" sz="1100" dirty="0">
+                <a:solidFill>
+                  <a:srgbClr val="075985"/>
+                </a:solidFill>
+                <a:latin typeface="Calibri" pitchFamily="34" charset="0"/>
+                <a:ea typeface="Calibri" pitchFamily="34" charset="-122"/>
+                <a:cs typeface="Calibri" pitchFamily="34" charset="-120"/>
+              </a:rPr>
+              <a:t> · le maschere di bit</a:t>
+            </a:r>
+            <a:endParaRPr lang="en-US" sz="1100" dirty="0"/>
+          </a:p>
+        </p:txBody>
+      </p:sp>
+      <p:sp>
+        <p:nvSpPr>
           <p:cNvPr id="25" name="Slide Number Placeholder 0"/>
           <p:cNvSpPr>
             <a:spLocks noGrp="1"/>
@@ -17202,6 +19637,133 @@
       </p:sp>
       <p:sp>
         <p:nvSpPr>
+          <p:cNvPr id="10" name="Shape 7"/>
+          <p:cNvSpPr/>
+          <p:nvPr/>
+        </p:nvSpPr>
+        <p:spPr>
+          <a:xfrm>
+            <a:off x="8051622" y="91440"/>
+            <a:ext cx="3591433" cy="274320"/>
+          </a:xfrm>
+          <a:prstGeom prst="rect">
+            <a:avLst/>
+          </a:prstGeom>
+          <a:solidFill>
+            <a:srgbClr val="E0F2FE"/>
+          </a:solidFill>
+          <a:ln w="12700">
+            <a:solidFill>
+              <a:srgbClr val="0369A1"/>
+            </a:solidFill>
+            <a:prstDash val="solid"/>
+          </a:ln>
+        </p:spPr>
+      </p:sp>
+      <p:sp>
+        <p:nvSpPr>
+          <p:cNvPr id="11" name="Shape 8"/>
+          <p:cNvSpPr/>
+          <p:nvPr/>
+        </p:nvSpPr>
+        <p:spPr>
+          <a:xfrm>
+            <a:off x="8051622" y="91440"/>
+            <a:ext cx="73152" cy="274320"/>
+          </a:xfrm>
+          <a:prstGeom prst="rect">
+            <a:avLst/>
+          </a:prstGeom>
+          <a:solidFill>
+            <a:srgbClr val="0369A1"/>
+          </a:solidFill>
+          <a:ln w="12700">
+            <a:solidFill>
+              <a:srgbClr val="0369A1"/>
+            </a:solidFill>
+            <a:prstDash val="solid"/>
+          </a:ln>
+        </p:spPr>
+      </p:sp>
+      <p:pic>
+        <p:nvPicPr>
+          <p:cNvPr id="12" name="Image 1" descr="preencoded.png">    </p:cNvPr>
+          <p:cNvPicPr>
+            <a:picLocks noChangeAspect="1"/>
+          </p:cNvPicPr>
+          <p:nvPr/>
+        </p:nvPicPr>
+        <p:blipFill>
+          <a:blip r:embed="rId2"/>
+          <a:stretch>
+            <a:fillRect/>
+          </a:stretch>
+        </p:blipFill>
+        <p:spPr>
+          <a:xfrm>
+            <a:off x="8179638" y="128016"/>
+            <a:ext cx="201168" cy="201168"/>
+          </a:xfrm>
+          <a:prstGeom prst="rect">
+            <a:avLst/>
+          </a:prstGeom>
+        </p:spPr>
+      </p:pic>
+      <p:sp>
+        <p:nvSpPr>
+          <p:cNvPr id="13" name="Text 9"/>
+          <p:cNvSpPr txBox="1"/>
+          <p:nvPr/>
+        </p:nvSpPr>
+        <p:spPr>
+          <a:xfrm>
+            <a:off x="8435670" y="91440"/>
+            <a:ext cx="3170809" cy="274320"/>
+          </a:xfrm>
+          <a:prstGeom prst="rect">
+            <a:avLst/>
+          </a:prstGeom>
+          <a:noFill/>
+          <a:ln/>
+        </p:spPr>
+        <p:txBody>
+          <a:bodyPr wrap="square" lIns="0" tIns="0" rIns="0" bIns="0" rtlCol="0" anchor="ctr"/>
+          <a:lstStyle/>
+          <a:p>
+            <a:pPr indent="0" marL="0">
+              <a:buNone/>
+            </a:pPr>
+            <a:r>
+              <a:rPr lang="en-US" sz="1100" b="1" dirty="0">
+                <a:solidFill>
+                  <a:srgbClr val="075985"/>
+                </a:solidFill>
+                <a:latin typeface="Calibri" pitchFamily="34" charset="0"/>
+                <a:ea typeface="Calibri" pitchFamily="34" charset="-122"/>
+                <a:cs typeface="Calibri" pitchFamily="34" charset="-120"/>
+              </a:rPr>
+              <a:t>DA COMPRENDERE OGGI</a:t>
+            </a:r>
+            <a:pPr indent="0" marL="0">
+              <a:buNone/>
+            </a:pPr>
+            <a:r>
+              <a:rPr lang="en-US" sz="1100" dirty="0">
+                <a:solidFill>
+                  <a:srgbClr val="075985"/>
+                </a:solidFill>
+                <a:latin typeface="Calibri" pitchFamily="34" charset="0"/>
+                <a:ea typeface="Calibri" pitchFamily="34" charset="-122"/>
+                <a:cs typeface="Calibri" pitchFamily="34" charset="-120"/>
+              </a:rPr>
+              <a:t> · le maschere di bit</a:t>
+            </a:r>
+            <a:endParaRPr lang="en-US" sz="1100" dirty="0"/>
+          </a:p>
+        </p:txBody>
+      </p:sp>
+      <p:sp>
+        <p:nvSpPr>
           <p:cNvPr id="25" name="Slide Number Placeholder 0"/>
           <p:cNvSpPr>
             <a:spLocks noGrp="1"/>
@@ -17717,6 +20279,158 @@
               <a:t>.global l08_draw</a:t>
             </a:r>
             <a:endParaRPr lang="en-US" sz="1350" dirty="0"/>
+          </a:p>
+        </p:txBody>
+      </p:sp>
+      <p:sp>
+        <p:nvSpPr>
+          <p:cNvPr id="5" name="Shape 3"/>
+          <p:cNvSpPr/>
+          <p:nvPr/>
+        </p:nvSpPr>
+        <p:spPr>
+          <a:xfrm>
+            <a:off x="7941259" y="91440"/>
+            <a:ext cx="3701796" cy="274320"/>
+          </a:xfrm>
+          <a:prstGeom prst="rect">
+            <a:avLst/>
+          </a:prstGeom>
+          <a:solidFill>
+            <a:srgbClr val="FEF3C7"/>
+          </a:solidFill>
+          <a:ln w="12700">
+            <a:solidFill>
+              <a:srgbClr val="B45309"/>
+            </a:solidFill>
+            <a:prstDash val="solid"/>
+          </a:ln>
+        </p:spPr>
+      </p:sp>
+      <p:sp>
+        <p:nvSpPr>
+          <p:cNvPr id="6" name="Shape 4"/>
+          <p:cNvSpPr/>
+          <p:nvPr/>
+        </p:nvSpPr>
+        <p:spPr>
+          <a:xfrm>
+            <a:off x="7941259" y="91440"/>
+            <a:ext cx="27432" cy="274320"/>
+          </a:xfrm>
+          <a:prstGeom prst="rect">
+            <a:avLst/>
+          </a:prstGeom>
+          <a:solidFill>
+            <a:srgbClr val="B45309"/>
+          </a:solidFill>
+          <a:ln w="12700">
+            <a:solidFill>
+              <a:srgbClr val="B45309"/>
+            </a:solidFill>
+            <a:prstDash val="solid"/>
+          </a:ln>
+        </p:spPr>
+      </p:sp>
+      <p:sp>
+        <p:nvSpPr>
+          <p:cNvPr id="7" name="Shape 5"/>
+          <p:cNvSpPr/>
+          <p:nvPr/>
+        </p:nvSpPr>
+        <p:spPr>
+          <a:xfrm>
+            <a:off x="7996123" y="91440"/>
+            <a:ext cx="27432" cy="274320"/>
+          </a:xfrm>
+          <a:prstGeom prst="rect">
+            <a:avLst/>
+          </a:prstGeom>
+          <a:solidFill>
+            <a:srgbClr val="B45309"/>
+          </a:solidFill>
+          <a:ln w="12700">
+            <a:solidFill>
+              <a:srgbClr val="B45309"/>
+            </a:solidFill>
+            <a:prstDash val="solid"/>
+          </a:ln>
+        </p:spPr>
+      </p:sp>
+      <p:pic>
+        <p:nvPicPr>
+          <p:cNvPr id="8" name="Image 0" descr="preencoded.png">    </p:cNvPr>
+          <p:cNvPicPr>
+            <a:picLocks noChangeAspect="1"/>
+          </p:cNvPicPr>
+          <p:nvPr/>
+        </p:nvPicPr>
+        <p:blipFill>
+          <a:blip r:embed="rId1"/>
+          <a:stretch>
+            <a:fillRect/>
+          </a:stretch>
+        </p:blipFill>
+        <p:spPr>
+          <a:xfrm>
+            <a:off x="8069275" y="128016"/>
+            <a:ext cx="201168" cy="201168"/>
+          </a:xfrm>
+          <a:prstGeom prst="rect">
+            <a:avLst/>
+          </a:prstGeom>
+        </p:spPr>
+      </p:pic>
+      <p:sp>
+        <p:nvSpPr>
+          <p:cNvPr id="9" name="Text 6"/>
+          <p:cNvSpPr txBox="1"/>
+          <p:nvPr/>
+        </p:nvSpPr>
+        <p:spPr>
+          <a:xfrm>
+            <a:off x="8325307" y="91440"/>
+            <a:ext cx="3281172" cy="274320"/>
+          </a:xfrm>
+          <a:prstGeom prst="rect">
+            <a:avLst/>
+          </a:prstGeom>
+          <a:noFill/>
+          <a:ln/>
+        </p:spPr>
+        <p:txBody>
+          <a:bodyPr wrap="square" lIns="0" tIns="0" rIns="0" bIns="0" rtlCol="0" anchor="ctr"/>
+          <a:lstStyle/>
+          <a:p>
+            <a:pPr indent="0" marL="0">
+              <a:buNone/>
+            </a:pPr>
+            <a:r>
+              <a:rPr lang="en-US" sz="1100" b="1" dirty="0">
+                <a:solidFill>
+                  <a:srgbClr val="92400E"/>
+                </a:solidFill>
+                <a:latin typeface="Calibri" pitchFamily="34" charset="0"/>
+                <a:ea typeface="Calibri" pitchFamily="34" charset="-122"/>
+                <a:cs typeface="Calibri" pitchFamily="34" charset="-120"/>
+              </a:rPr>
+              <a:t>DA UTILIZZARE OGGI</a:t>
+            </a:r>
+            <a:pPr indent="0" marL="0">
+              <a:buNone/>
+            </a:pPr>
+            <a:r>
+              <a:rPr lang="en-US" sz="1100" dirty="0">
+                <a:solidFill>
+                  <a:srgbClr val="92400E"/>
+                </a:solidFill>
+                <a:latin typeface="Calibri" pitchFamily="34" charset="0"/>
+                <a:ea typeface="Calibri" pitchFamily="34" charset="-122"/>
+                <a:cs typeface="Calibri" pitchFamily="34" charset="-120"/>
+              </a:rPr>
+              <a:t> · il programma completo</a:t>
+            </a:r>
+            <a:endParaRPr lang="en-US" sz="1100" dirty="0"/>
           </a:p>
         </p:txBody>
       </p:sp>

--- a/it/slides/08-Architettura_dei_Calcolatori-Algebra_di_Boole_1-Codice.pptx
+++ b/it/slides/08-Architettura_dei_Calcolatori-Algebra_di_Boole_1-Codice.pptx
@@ -126,19 +126,19 @@
   <p:extLst>
     <p:ext uri="{521415D9-36F7-43E2-AB2F-B90AF26B5E84}">
       <p14:sectionLst xmlns:p14="http://schemas.microsoft.com/office/powerpoint/2010/main">
-        <p14:section name="Apertura" id="{177ec0d8-6948-9c24-0c7f-b96893c3fd9f}">
+        <p14:section name="Apertura" id="{441fd210-fffd-f6d1-1b6a-0a1c3d0fc84e}">
           <p14:sldIdLst>
             <p14:sldId id="256"/>
             <p14:sldId id="257"/>
           </p14:sldIdLst>
         </p14:section>
-        <p14:section name="Riscaldamento sulla macchina" id="{4a7b56fb-9f20-48a8-854b-1a63e3a2d20f}">
+        <p14:section name="Riscaldamento sulla macchina" id="{15623fd1-9e86-7c96-ad2d-846e089cb40a}">
           <p14:sldIdLst>
             <p14:sldId id="258"/>
             <p14:sldId id="259"/>
           </p14:sldIdLst>
         </p14:section>
-        <p14:section name="Ritorno alla macchina" id="{e3b50ac2-79a1-691d-0d0a-5f9cc6c21d40}">
+        <p14:section name="Ritorno alla macchina" id="{2d48f5b7-640f-9d10-eeca-ff843e47cb2f}">
           <p14:sldIdLst>
             <p14:sldId id="260"/>
             <p14:sldId id="261"/>
@@ -146,7 +146,7 @@
             <p14:sldId id="263"/>
           </p14:sldIdLst>
         </p14:section>
-        <p14:section name="Il programma completo" id="{5efbae44-65b4-de01-4891-5889c5ea41c0}">
+        <p14:section name="Il programma completo" id="{e7ccabde-4145-ecf5-600d-25552d8c2034}">
           <p14:sldIdLst>
             <p14:sldId id="264"/>
             <p14:sldId id="265"/>
@@ -156,7 +156,7 @@
             <p14:sldId id="269"/>
           </p14:sldIdLst>
         </p14:section>
-        <p14:section name="Eseguire e provare" id="{6735297a-b9bb-9ce8-f1c6-cf4e8204db58}">
+        <p14:section name="Eseguire e provare" id="{a717561e-579a-8b99-d354-ff5c2088fd69}">
           <p14:sldIdLst>
             <p14:sldId id="270"/>
             <p14:sldId id="271"/>
@@ -165,7 +165,7 @@
             <p14:sldId id="274"/>
           </p14:sldIdLst>
         </p14:section>
-        <p14:section name="Esercizi" id="{5c47762d-f083-2472-18a6-7a69244b272f}">
+        <p14:section name="Esercizi" id="{a69eda9e-78c1-bc0b-00af-dea2e1413393}">
           <p14:sldIdLst>
             <p14:sldId id="275"/>
           </p14:sldIdLst>
